--- a/docs/SC6109_parallel_evm.pptx
+++ b/docs/SC6109_parallel_evm.pptx
@@ -118,1237 +118,6 @@
     </a:lvl9pPr>
   </p:defaultTextStyle>
 </p:presentation>
-</file>
-
-<file path=ppt/charts/chart1.xml><?xml version="1.0" encoding="utf-8"?>
-<c:chartSpace xmlns:c="http://schemas.openxmlformats.org/drawingml/2006/chart" xmlns:a="http://schemas.openxmlformats.org/drawingml/2006/main" xmlns:r="http://schemas.openxmlformats.org/officeDocument/2006/relationships">
-  <c:date1904 val="0"/>
-  <c:roundedCorners val="1"/>
-  <c:chart>
-    <c:title>
-      <c:tx>
-        <c:rich>
-          <a:bodyPr/>
-          <a:lstStyle/>
-          <a:p>
-            <a:pPr>
-              <a:defRPr sz="1400" b="0" i="0" u="none" strike="noStrike">
-                <a:solidFill>
-                  <a:srgbClr val="14181F"/>
-                </a:solidFill>
-                <a:latin typeface="Arial"/>
-              </a:defRPr>
-            </a:pPr>
-            <a:r>
-              <a:rPr sz="1400" b="0" i="0" u="none" strike="noStrike">
-                <a:solidFill>
-                  <a:srgbClr val="14181F"/>
-                </a:solidFill>
-                <a:latin typeface="Arial"/>
-              </a:rPr>
-              <a:t>Speedup at 6 threads vs sequential time per transaction</a:t>
-            </a:r>
-          </a:p>
-        </c:rich>
-      </c:tx>
-      <c:layout/>
-      <c:overlay val="0"/>
-    </c:title>
-    <c:autoTitleDeleted val="0"/>
-    <c:plotArea>
-      <c:layout/>
-      <c:lineChart>
-        <c:varyColors val="0"/>
-        <c:ser>
-          <c:idx val="0"/>
-          <c:order val="0"/>
-          <c:tx>
-            <c:strRef>
-              <c:f>Sheet1!$B$1</c:f>
-              <c:strCache>
-                <c:ptCount val="1"/>
-                <c:pt idx="0">
-                  <c:v>M2a round-based</c:v>
-                </c:pt>
-              </c:strCache>
-            </c:strRef>
-          </c:tx>
-          <c:spPr>
-            <a:solidFill>
-              <a:srgbClr val="2A78D6"/>
-            </a:solidFill>
-            <a:ln w="31750" cap="flat">
-              <a:solidFill>
-                <a:srgbClr val="2A78D6"/>
-              </a:solidFill>
-              <a:prstDash val="solid"/>
-              <a:round/>
-            </a:ln>
-            <a:effectLst/>
-          </c:spPr>
-          <c:invertIfNegative val="0"/>
-          <c:dLbls>
-            <c:numFmt formatCode="#,##0" sourceLinked="0"/>
-            <c:txPr>
-              <a:bodyPr/>
-              <a:lstStyle/>
-              <a:p>
-                <a:pPr>
-                  <a:defRPr b="0" i="0" strike="noStrike" sz="1200" u="none">
-                    <a:solidFill>
-                      <a:srgbClr val="000000"/>
-                    </a:solidFill>
-                    <a:latin typeface="Arial"/>
-                  </a:defRPr>
-                </a:pPr>
-              </a:p>
-            </c:txPr>
-            <c:showLegendKey val="0"/>
-            <c:showVal val="0"/>
-            <c:showCatName val="0"/>
-            <c:showSerName val="0"/>
-            <c:showPercent val="0"/>
-            <c:showBubbleSize val="0"/>
-            <c:showLeaderLines val="0"/>
-          </c:dLbls>
-          <c:marker>
-            <c:symbol val="circle"/>
-            <c:size val="9"/>
-            <c:spPr>
-              <a:solidFill>
-                <a:srgbClr val="2A78D6"/>
-              </a:solidFill>
-              <a:ln w="9525" cap="flat">
-                <a:solidFill>
-                  <a:srgbClr val="2A78D6"/>
-                </a:solidFill>
-                <a:prstDash val="solid"/>
-                <a:round/>
-              </a:ln>
-              <a:effectLst/>
-            </c:spPr>
-          </c:marker>
-          <c:cat>
-            <c:multiLvlStrRef>
-              <c:f>Sheet1!$A$2:$A$5</c:f>
-              <c:multiLvlStrCache>
-                <c:ptCount val="4"/>
-                <c:lvl>
-                  <c:pt idx="0">
-                    <c:v>1.6 µs (0 B)</c:v>
-                  </c:pt>
-                  <c:pt idx="1">
-                    <c:v>4.1 µs (1 KB)</c:v>
-                  </c:pt>
-                  <c:pt idx="2">
-                    <c:v>21 µs (8 KB)</c:v>
-                  </c:pt>
-                  <c:pt idx="3">
-                    <c:v>78 µs (32 KB)</c:v>
-                  </c:pt>
-                </c:lvl>
-              </c:multiLvlStrCache>
-            </c:multiLvlStrRef>
-          </c:cat>
-          <c:val>
-            <c:numRef>
-              <c:f>Sheet1!$B$2:$B$5</c:f>
-              <c:numCache>
-                <c:formatCode>General</c:formatCode>
-                <c:ptCount val="4"/>
-                <c:pt idx="0">
-                  <c:v>1.07</c:v>
-                </c:pt>
-                <c:pt idx="1">
-                  <c:v>3.11</c:v>
-                </c:pt>
-                <c:pt idx="2">
-                  <c:v>5.05</c:v>
-                </c:pt>
-                <c:pt idx="3">
-                  <c:v>5.51</c:v>
-                </c:pt>
-              </c:numCache>
-            </c:numRef>
-          </c:val>
-          <c:smooth val="0"/>
-        </c:ser>
-        <c:ser>
-          <c:idx val="1"/>
-          <c:order val="1"/>
-          <c:tx>
-            <c:strRef>
-              <c:f>Sheet1!$C$1</c:f>
-              <c:strCache>
-                <c:ptCount val="1"/>
-                <c:pt idx="0">
-                  <c:v>M2b Block-STM</c:v>
-                </c:pt>
-              </c:strCache>
-            </c:strRef>
-          </c:tx>
-          <c:spPr>
-            <a:solidFill>
-              <a:srgbClr val="EB6834"/>
-            </a:solidFill>
-            <a:ln w="31750" cap="flat">
-              <a:solidFill>
-                <a:srgbClr val="EB6834"/>
-              </a:solidFill>
-              <a:prstDash val="solid"/>
-              <a:round/>
-            </a:ln>
-            <a:effectLst/>
-          </c:spPr>
-          <c:invertIfNegative val="0"/>
-          <c:dLbls>
-            <c:numFmt formatCode="#,##0" sourceLinked="0"/>
-            <c:txPr>
-              <a:bodyPr/>
-              <a:lstStyle/>
-              <a:p>
-                <a:pPr>
-                  <a:defRPr b="0" i="0" strike="noStrike" sz="1200" u="none">
-                    <a:solidFill>
-                      <a:srgbClr val="000000"/>
-                    </a:solidFill>
-                    <a:latin typeface="Arial"/>
-                  </a:defRPr>
-                </a:pPr>
-              </a:p>
-            </c:txPr>
-            <c:showLegendKey val="0"/>
-            <c:showVal val="0"/>
-            <c:showCatName val="0"/>
-            <c:showSerName val="0"/>
-            <c:showPercent val="0"/>
-            <c:showBubbleSize val="0"/>
-            <c:showLeaderLines val="0"/>
-          </c:dLbls>
-          <c:marker>
-            <c:symbol val="circle"/>
-            <c:size val="9"/>
-            <c:spPr>
-              <a:solidFill>
-                <a:srgbClr val="EB6834"/>
-              </a:solidFill>
-              <a:ln w="9525" cap="flat">
-                <a:solidFill>
-                  <a:srgbClr val="EB6834"/>
-                </a:solidFill>
-                <a:prstDash val="solid"/>
-                <a:round/>
-              </a:ln>
-              <a:effectLst/>
-            </c:spPr>
-          </c:marker>
-          <c:cat>
-            <c:multiLvlStrRef>
-              <c:f>Sheet1!$A$2:$A$5</c:f>
-              <c:multiLvlStrCache>
-                <c:ptCount val="4"/>
-                <c:lvl>
-                  <c:pt idx="0">
-                    <c:v>1.6 µs (0 B)</c:v>
-                  </c:pt>
-                  <c:pt idx="1">
-                    <c:v>4.1 µs (1 KB)</c:v>
-                  </c:pt>
-                  <c:pt idx="2">
-                    <c:v>21 µs (8 KB)</c:v>
-                  </c:pt>
-                  <c:pt idx="3">
-                    <c:v>78 µs (32 KB)</c:v>
-                  </c:pt>
-                </c:lvl>
-              </c:multiLvlStrCache>
-            </c:multiLvlStrRef>
-          </c:cat>
-          <c:val>
-            <c:numRef>
-              <c:f>Sheet1!$C$2:$C$5</c:f>
-              <c:numCache>
-                <c:formatCode>General</c:formatCode>
-                <c:ptCount val="4"/>
-                <c:pt idx="0">
-                  <c:v>1.61</c:v>
-                </c:pt>
-                <c:pt idx="1">
-                  <c:v>3.18</c:v>
-                </c:pt>
-                <c:pt idx="2">
-                  <c:v>5.16</c:v>
-                </c:pt>
-                <c:pt idx="3">
-                  <c:v>5.58</c:v>
-                </c:pt>
-              </c:numCache>
-            </c:numRef>
-          </c:val>
-          <c:smooth val="0"/>
-        </c:ser>
-        <c:ser>
-          <c:idx val="2"/>
-          <c:order val="2"/>
-          <c:tx>
-            <c:strRef>
-              <c:f>Sheet1!$D$1</c:f>
-              <c:strCache>
-                <c:ptCount val="1"/>
-                <c:pt idx="0">
-                  <c:v>M3 static</c:v>
-                </c:pt>
-              </c:strCache>
-            </c:strRef>
-          </c:tx>
-          <c:spPr>
-            <a:solidFill>
-              <a:srgbClr val="1BAF7A"/>
-            </a:solidFill>
-            <a:ln w="31750" cap="flat">
-              <a:solidFill>
-                <a:srgbClr val="1BAF7A"/>
-              </a:solidFill>
-              <a:prstDash val="solid"/>
-              <a:round/>
-            </a:ln>
-            <a:effectLst/>
-          </c:spPr>
-          <c:invertIfNegative val="0"/>
-          <c:dLbls>
-            <c:numFmt formatCode="#,##0" sourceLinked="0"/>
-            <c:txPr>
-              <a:bodyPr/>
-              <a:lstStyle/>
-              <a:p>
-                <a:pPr>
-                  <a:defRPr b="0" i="0" strike="noStrike" sz="1200" u="none">
-                    <a:solidFill>
-                      <a:srgbClr val="000000"/>
-                    </a:solidFill>
-                    <a:latin typeface="Arial"/>
-                  </a:defRPr>
-                </a:pPr>
-              </a:p>
-            </c:txPr>
-            <c:showLegendKey val="0"/>
-            <c:showVal val="0"/>
-            <c:showCatName val="0"/>
-            <c:showSerName val="0"/>
-            <c:showPercent val="0"/>
-            <c:showBubbleSize val="0"/>
-            <c:showLeaderLines val="0"/>
-          </c:dLbls>
-          <c:marker>
-            <c:symbol val="circle"/>
-            <c:size val="9"/>
-            <c:spPr>
-              <a:solidFill>
-                <a:srgbClr val="1BAF7A"/>
-              </a:solidFill>
-              <a:ln w="9525" cap="flat">
-                <a:solidFill>
-                  <a:srgbClr val="1BAF7A"/>
-                </a:solidFill>
-                <a:prstDash val="solid"/>
-                <a:round/>
-              </a:ln>
-              <a:effectLst/>
-            </c:spPr>
-          </c:marker>
-          <c:cat>
-            <c:multiLvlStrRef>
-              <c:f>Sheet1!$A$2:$A$5</c:f>
-              <c:multiLvlStrCache>
-                <c:ptCount val="4"/>
-                <c:lvl>
-                  <c:pt idx="0">
-                    <c:v>1.6 µs (0 B)</c:v>
-                  </c:pt>
-                  <c:pt idx="1">
-                    <c:v>4.1 µs (1 KB)</c:v>
-                  </c:pt>
-                  <c:pt idx="2">
-                    <c:v>21 µs (8 KB)</c:v>
-                  </c:pt>
-                  <c:pt idx="3">
-                    <c:v>78 µs (32 KB)</c:v>
-                  </c:pt>
-                </c:lvl>
-              </c:multiLvlStrCache>
-            </c:multiLvlStrRef>
-          </c:cat>
-          <c:val>
-            <c:numRef>
-              <c:f>Sheet1!$D$2:$D$5</c:f>
-              <c:numCache>
-                <c:formatCode>General</c:formatCode>
-                <c:ptCount val="4"/>
-                <c:pt idx="0">
-                  <c:v>1.8</c:v>
-                </c:pt>
-                <c:pt idx="1">
-                  <c:v>3.58</c:v>
-                </c:pt>
-                <c:pt idx="2">
-                  <c:v>5.29</c:v>
-                </c:pt>
-                <c:pt idx="3">
-                  <c:v>5.46</c:v>
-                </c:pt>
-              </c:numCache>
-            </c:numRef>
-          </c:val>
-          <c:smooth val="0"/>
-        </c:ser>
-        <c:dLbls>
-          <c:numFmt formatCode="#,##0" sourceLinked="0"/>
-          <c:txPr>
-            <a:bodyPr/>
-            <a:lstStyle/>
-            <a:p>
-              <a:pPr>
-                <a:defRPr b="0" i="0" strike="noStrike" sz="1200" u="none">
-                  <a:solidFill>
-                    <a:srgbClr val="000000"/>
-                  </a:solidFill>
-                  <a:latin typeface="Arial"/>
-                </a:defRPr>
-              </a:pPr>
-            </a:p>
-          </c:txPr>
-          <c:showLegendKey val="0"/>
-          <c:showVal val="0"/>
-          <c:showCatName val="0"/>
-          <c:showSerName val="0"/>
-          <c:showPercent val="0"/>
-          <c:showBubbleSize val="0"/>
-          <c:showLeaderLines val="0"/>
-        </c:dLbls>
-        <c:marker val="1"/>
-        <c:axId val="2094734554"/>
-        <c:axId val="2094734552"/>
-        <c:axId val="2094734556"/>
-      </c:lineChart>
-      <c:catAx>
-        <c:axId val="2094734554"/>
-        <c:scaling>
-          <c:orientation val="minMax"/>
-        </c:scaling>
-        <c:delete val="0"/>
-        <c:axPos val="b"/>
-        <c:numFmt formatCode="General" sourceLinked="1"/>
-        <c:majorTickMark val="out"/>
-        <c:minorTickMark val="none"/>
-        <c:tickLblPos val="low"/>
-        <c:spPr>
-          <a:ln w="12700" cap="flat">
-            <a:solidFill>
-              <a:srgbClr val="888888"/>
-            </a:solidFill>
-            <a:prstDash val="solid"/>
-            <a:round/>
-          </a:ln>
-        </c:spPr>
-        <c:txPr>
-          <a:bodyPr/>
-          <a:lstStyle/>
-          <a:p>
-            <a:pPr>
-              <a:defRPr sz="1200" b="0" i="0" u="none" strike="noStrike">
-                <a:solidFill>
-                  <a:srgbClr val="5A6272"/>
-                </a:solidFill>
-                <a:latin typeface="Arial"/>
-              </a:defRPr>
-            </a:pPr>
-            <a:endParaRPr lang="en-US"/>
-          </a:p>
-        </c:txPr>
-        <c:crossAx val="2094734552"/>
-        <c:crosses val="autoZero"/>
-        <c:auto val="1"/>
-        <c:lblAlgn val="ctr"/>
-        <c:noMultiLvlLbl val="1"/>
-      </c:catAx>
-      <c:valAx>
-        <c:axId val="2094734552"/>
-        <c:scaling>
-          <c:orientation val="minMax"/>
-          <c:max val="6"/>
-          <c:min val="0"/>
-        </c:scaling>
-        <c:delete val="0"/>
-        <c:axPos val="l"/>
-        <c:majorGridlines>
-          <c:spPr>
-            <a:ln w="12700" cap="flat">
-              <a:solidFill>
-                <a:srgbClr val="E3E5EA"/>
-              </a:solidFill>
-              <a:prstDash val="solid"/>
-              <a:round/>
-            </a:ln>
-          </c:spPr>
-        </c:majorGridlines>
-        <c:title>
-          <c:tx>
-            <c:rich>
-              <a:bodyPr/>
-              <a:lstStyle/>
-              <a:p>
-                <a:pPr>
-                  <a:defRPr sz="1200" b="0" i="0" u="none" strike="noStrike">
-                    <a:solidFill>
-                      <a:srgbClr val="5A6272"/>
-                    </a:solidFill>
-                    <a:latin typeface="Arial"/>
-                  </a:defRPr>
-                </a:pPr>
-                <a:r>
-                  <a:rPr sz="1200" b="0" i="0" u="none" strike="noStrike">
-                    <a:solidFill>
-                      <a:srgbClr val="5A6272"/>
-                    </a:solidFill>
-                    <a:latin typeface="Arial"/>
-                  </a:rPr>
-                  <a:t>speedup</a:t>
-                </a:r>
-              </a:p>
-            </c:rich>
-          </c:tx>
-          <c:layout/>
-          <c:overlay val="0"/>
-        </c:title>
-        <c:numFmt formatCode="General" sourceLinked="0"/>
-        <c:majorTickMark val="out"/>
-        <c:minorTickMark val="none"/>
-        <c:tickLblPos val="nextTo"/>
-        <c:spPr>
-          <a:ln w="12700" cap="flat">
-            <a:solidFill>
-              <a:srgbClr val="888888"/>
-            </a:solidFill>
-            <a:prstDash val="solid"/>
-            <a:round/>
-          </a:ln>
-        </c:spPr>
-        <c:txPr>
-          <a:bodyPr/>
-          <a:lstStyle/>
-          <a:p>
-            <a:pPr>
-              <a:defRPr sz="1200" b="0" i="0" u="none" strike="noStrike">
-                <a:solidFill>
-                  <a:srgbClr val="5A6272"/>
-                </a:solidFill>
-                <a:latin typeface="Arial"/>
-              </a:defRPr>
-            </a:pPr>
-            <a:endParaRPr lang="en-US"/>
-          </a:p>
-        </c:txPr>
-        <c:crossAx val="2094734554"/>
-        <c:crosses val="autoZero"/>
-        <c:crossBetween val="between"/>
-        <c:majorUnit val="1"/>
-      </c:valAx>
-      <c:spPr>
-        <a:noFill/>
-        <a:ln>
-          <a:noFill/>
-        </a:ln>
-        <a:effectLst/>
-      </c:spPr>
-    </c:plotArea>
-    <c:legend>
-      <c:legendPos val="b"/>
-      <c:overlay val="0"/>
-      <c:txPr>
-        <a:bodyPr/>
-        <a:lstStyle/>
-        <a:p>
-          <a:pPr>
-            <a:defRPr sz="1200">
-              <a:solidFill>
-                <a:srgbClr val="14181F"/>
-              </a:solidFill>
-            </a:defRPr>
-          </a:pPr>
-          <a:endParaRPr lang="en-US"/>
-        </a:p>
-      </c:txPr>
-    </c:legend>
-    <c:plotVisOnly val="1"/>
-    <c:dispBlanksAs val="span"/>
-  </c:chart>
-  <c:spPr>
-    <a:noFill/>
-    <a:ln>
-      <a:noFill/>
-    </a:ln>
-    <a:effectLst/>
-  </c:spPr>
-  <c:externalData r:id="rId1">
-    <c:autoUpdate val="0"/>
-  </c:externalData>
-</c:chartSpace>
-</file>
-
-<file path=ppt/charts/chart2.xml><?xml version="1.0" encoding="utf-8"?>
-<c:chartSpace xmlns:c="http://schemas.openxmlformats.org/drawingml/2006/chart" xmlns:a="http://schemas.openxmlformats.org/drawingml/2006/main" xmlns:r="http://schemas.openxmlformats.org/officeDocument/2006/relationships">
-  <c:date1904 val="0"/>
-  <c:roundedCorners val="1"/>
-  <c:chart>
-    <c:title>
-      <c:tx>
-        <c:rich>
-          <a:bodyPr/>
-          <a:lstStyle/>
-          <a:p>
-            <a:pPr>
-              <a:defRPr sz="1400" b="0" i="0" u="none" strike="noStrike">
-                <a:solidFill>
-                  <a:srgbClr val="14181F"/>
-                </a:solidFill>
-                <a:latin typeface="Arial"/>
-              </a:defRPr>
-            </a:pPr>
-            <a:r>
-              <a:rPr sz="1400" b="0" i="0" u="none" strike="noStrike">
-                <a:solidFill>
-                  <a:srgbClr val="14181F"/>
-                </a:solidFill>
-                <a:latin typeface="Arial"/>
-              </a:rPr>
-              <a:t>ERC-20 transfers among many holders, speedup at 6 threads</a:t>
-            </a:r>
-          </a:p>
-        </c:rich>
-      </c:tx>
-      <c:layout/>
-      <c:overlay val="0"/>
-    </c:title>
-    <c:autoTitleDeleted val="0"/>
-    <c:plotArea>
-      <c:layout/>
-      <c:barChart>
-        <c:barDir val="col"/>
-        <c:grouping val="clustered"/>
-        <c:varyColors val="0"/>
-        <c:ser>
-          <c:idx val="0"/>
-          <c:order val="0"/>
-          <c:tx>
-            <c:strRef>
-              <c:f>Sheet1!$B$1</c:f>
-              <c:strCache>
-                <c:ptCount val="1"/>
-                <c:pt idx="0">
-                  <c:v>per storage slot</c:v>
-                </c:pt>
-              </c:strCache>
-            </c:strRef>
-          </c:tx>
-          <c:spPr>
-            <a:solidFill>
-              <a:srgbClr val="2A78D6"/>
-            </a:solidFill>
-            <a:effectLst/>
-          </c:spPr>
-          <c:invertIfNegative val="0"/>
-          <c:dLbls>
-            <c:numFmt formatCode="0.00&quot;×&quot;" sourceLinked="0"/>
-            <c:txPr>
-              <a:bodyPr/>
-              <a:lstStyle/>
-              <a:p>
-                <a:pPr>
-                  <a:defRPr b="0" i="0" strike="noStrike" sz="1200" u="none">
-                    <a:solidFill>
-                      <a:srgbClr val="14181F"/>
-                    </a:solidFill>
-                    <a:latin typeface="Arial"/>
-                  </a:defRPr>
-                </a:pPr>
-              </a:p>
-            </c:txPr>
-            <c:showLegendKey val="0"/>
-            <c:showVal val="1"/>
-            <c:showCatName val="0"/>
-            <c:showSerName val="0"/>
-            <c:showPercent val="0"/>
-            <c:showBubbleSize val="0"/>
-            <c:showLeaderLines val="0"/>
-          </c:dLbls>
-          <c:cat>
-            <c:multiLvlStrRef>
-              <c:f>Sheet1!$A$2:$A$4</c:f>
-              <c:multiLvlStrCache>
-                <c:ptCount val="3"/>
-                <c:lvl>
-                  <c:pt idx="0">
-                    <c:v>M2a round-based</c:v>
-                  </c:pt>
-                  <c:pt idx="1">
-                    <c:v>M2b Block-STM</c:v>
-                  </c:pt>
-                  <c:pt idx="2">
-                    <c:v>M3 static</c:v>
-                  </c:pt>
-                </c:lvl>
-              </c:multiLvlStrCache>
-            </c:multiLvlStrRef>
-          </c:cat>
-          <c:val>
-            <c:numRef>
-              <c:f>Sheet1!$B$2:$B$4</c:f>
-              <c:numCache>
-                <c:formatCode>General</c:formatCode>
-                <c:ptCount val="3"/>
-                <c:pt idx="0">
-                  <c:v>2.87</c:v>
-                </c:pt>
-                <c:pt idx="1">
-                  <c:v>2.92</c:v>
-                </c:pt>
-                <c:pt idx="2">
-                  <c:v>3.1</c:v>
-                </c:pt>
-              </c:numCache>
-            </c:numRef>
-          </c:val>
-        </c:ser>
-        <c:ser>
-          <c:idx val="1"/>
-          <c:order val="1"/>
-          <c:tx>
-            <c:strRef>
-              <c:f>Sheet1!$C$1</c:f>
-              <c:strCache>
-                <c:ptCount val="1"/>
-                <c:pt idx="0">
-                  <c:v>per account</c:v>
-                </c:pt>
-              </c:strCache>
-            </c:strRef>
-          </c:tx>
-          <c:spPr>
-            <a:solidFill>
-              <a:srgbClr val="EB6834"/>
-            </a:solidFill>
-            <a:effectLst/>
-          </c:spPr>
-          <c:invertIfNegative val="0"/>
-          <c:dLbls>
-            <c:numFmt formatCode="0.00&quot;×&quot;" sourceLinked="0"/>
-            <c:txPr>
-              <a:bodyPr/>
-              <a:lstStyle/>
-              <a:p>
-                <a:pPr>
-                  <a:defRPr b="0" i="0" strike="noStrike" sz="1200" u="none">
-                    <a:solidFill>
-                      <a:srgbClr val="14181F"/>
-                    </a:solidFill>
-                    <a:latin typeface="Arial"/>
-                  </a:defRPr>
-                </a:pPr>
-              </a:p>
-            </c:txPr>
-            <c:showLegendKey val="0"/>
-            <c:showVal val="1"/>
-            <c:showCatName val="0"/>
-            <c:showSerName val="0"/>
-            <c:showPercent val="0"/>
-            <c:showBubbleSize val="0"/>
-            <c:showLeaderLines val="0"/>
-          </c:dLbls>
-          <c:cat>
-            <c:multiLvlStrRef>
-              <c:f>Sheet1!$A$2:$A$4</c:f>
-              <c:multiLvlStrCache>
-                <c:ptCount val="3"/>
-                <c:lvl>
-                  <c:pt idx="0">
-                    <c:v>M2a round-based</c:v>
-                  </c:pt>
-                  <c:pt idx="1">
-                    <c:v>M2b Block-STM</c:v>
-                  </c:pt>
-                  <c:pt idx="2">
-                    <c:v>M3 static</c:v>
-                  </c:pt>
-                </c:lvl>
-              </c:multiLvlStrCache>
-            </c:multiLvlStrRef>
-          </c:cat>
-          <c:val>
-            <c:numRef>
-              <c:f>Sheet1!$C$2:$C$4</c:f>
-              <c:numCache>
-                <c:formatCode>General</c:formatCode>
-                <c:ptCount val="3"/>
-                <c:pt idx="0">
-                  <c:v>0.01</c:v>
-                </c:pt>
-                <c:pt idx="1">
-                  <c:v>0.5</c:v>
-                </c:pt>
-                <c:pt idx="2">
-                  <c:v>0.31</c:v>
-                </c:pt>
-              </c:numCache>
-            </c:numRef>
-          </c:val>
-        </c:ser>
-        <c:dLbls>
-          <c:numFmt formatCode="0.00&quot;×&quot;" sourceLinked="0"/>
-          <c:txPr>
-            <a:bodyPr/>
-            <a:lstStyle/>
-            <a:p>
-              <a:pPr>
-                <a:defRPr b="0" i="0" strike="noStrike" sz="1200" u="none">
-                  <a:solidFill>
-                    <a:srgbClr val="14181F"/>
-                  </a:solidFill>
-                  <a:latin typeface="Arial"/>
-                </a:defRPr>
-              </a:pPr>
-            </a:p>
-          </c:txPr>
-          <c:showLegendKey val="0"/>
-          <c:showVal val="1"/>
-          <c:showCatName val="0"/>
-          <c:showSerName val="0"/>
-          <c:showPercent val="0"/>
-          <c:showBubbleSize val="0"/>
-          <c:showLeaderLines val="0"/>
-        </c:dLbls>
-        <c:gapWidth val="60"/>
-        <c:overlap val="0"/>
-        <c:axId val="2094734554"/>
-        <c:axId val="2094734552"/>
-        <c:axId val="2094734556"/>
-      </c:barChart>
-      <c:catAx>
-        <c:axId val="2094734554"/>
-        <c:scaling>
-          <c:orientation val="minMax"/>
-        </c:scaling>
-        <c:delete val="0"/>
-        <c:axPos val="b"/>
-        <c:numFmt formatCode="General" sourceLinked="1"/>
-        <c:majorTickMark val="out"/>
-        <c:minorTickMark val="none"/>
-        <c:tickLblPos val="low"/>
-        <c:spPr>
-          <a:ln w="12700" cap="flat">
-            <a:solidFill>
-              <a:srgbClr val="888888"/>
-            </a:solidFill>
-            <a:prstDash val="solid"/>
-            <a:round/>
-          </a:ln>
-        </c:spPr>
-        <c:txPr>
-          <a:bodyPr/>
-          <a:lstStyle/>
-          <a:p>
-            <a:pPr>
-              <a:defRPr sz="1300" b="0" i="0" u="none" strike="noStrike">
-                <a:solidFill>
-                  <a:srgbClr val="14181F"/>
-                </a:solidFill>
-                <a:latin typeface="Arial"/>
-              </a:defRPr>
-            </a:pPr>
-            <a:endParaRPr lang="en-US"/>
-          </a:p>
-        </c:txPr>
-        <c:crossAx val="2094734552"/>
-        <c:crosses val="autoZero"/>
-        <c:auto val="1"/>
-        <c:lblAlgn val="ctr"/>
-        <c:noMultiLvlLbl val="1"/>
-      </c:catAx>
-      <c:valAx>
-        <c:axId val="2094734552"/>
-        <c:scaling>
-          <c:orientation val="minMax"/>
-          <c:max val="3.5"/>
-          <c:min val="0"/>
-        </c:scaling>
-        <c:delete val="0"/>
-        <c:axPos val="l"/>
-        <c:majorGridlines>
-          <c:spPr>
-            <a:ln w="12700" cap="flat">
-              <a:solidFill>
-                <a:srgbClr val="E3E5EA"/>
-              </a:solidFill>
-              <a:prstDash val="solid"/>
-              <a:round/>
-            </a:ln>
-          </c:spPr>
-        </c:majorGridlines>
-        <c:numFmt formatCode="General" sourceLinked="0"/>
-        <c:majorTickMark val="out"/>
-        <c:minorTickMark val="none"/>
-        <c:tickLblPos val="nextTo"/>
-        <c:spPr>
-          <a:ln w="12700" cap="flat">
-            <a:solidFill>
-              <a:srgbClr val="888888"/>
-            </a:solidFill>
-            <a:prstDash val="solid"/>
-            <a:round/>
-          </a:ln>
-        </c:spPr>
-        <c:txPr>
-          <a:bodyPr/>
-          <a:lstStyle/>
-          <a:p>
-            <a:pPr>
-              <a:defRPr sz="1200" b="0" i="0" u="none" strike="noStrike">
-                <a:solidFill>
-                  <a:srgbClr val="5A6272"/>
-                </a:solidFill>
-                <a:latin typeface="Arial"/>
-              </a:defRPr>
-            </a:pPr>
-            <a:endParaRPr lang="en-US"/>
-          </a:p>
-        </c:txPr>
-        <c:crossAx val="2094734554"/>
-        <c:crosses val="autoZero"/>
-        <c:crossBetween val="between"/>
-        <c:majorUnit val="0.5"/>
-      </c:valAx>
-      <c:spPr>
-        <a:noFill/>
-        <a:ln>
-          <a:noFill/>
-        </a:ln>
-        <a:effectLst/>
-      </c:spPr>
-    </c:plotArea>
-    <c:legend>
-      <c:legendPos val="b"/>
-      <c:overlay val="0"/>
-      <c:txPr>
-        <a:bodyPr/>
-        <a:lstStyle/>
-        <a:p>
-          <a:pPr>
-            <a:defRPr sz="1200">
-              <a:solidFill>
-                <a:srgbClr val="14181F"/>
-              </a:solidFill>
-            </a:defRPr>
-          </a:pPr>
-          <a:endParaRPr lang="en-US"/>
-        </a:p>
-      </c:txPr>
-    </c:legend>
-    <c:plotVisOnly val="1"/>
-    <c:dispBlanksAs val="span"/>
-  </c:chart>
-  <c:spPr>
-    <a:noFill/>
-    <a:ln>
-      <a:noFill/>
-    </a:ln>
-    <a:effectLst/>
-  </c:spPr>
-  <c:externalData r:id="rId1">
-    <c:autoUpdate val="0"/>
-  </c:externalData>
-</c:chartSpace>
-</file>
-
-<file path=ppt/charts/chart3.xml><?xml version="1.0" encoding="utf-8"?>
-<c:chartSpace xmlns:c="http://schemas.openxmlformats.org/drawingml/2006/chart" xmlns:a="http://schemas.openxmlformats.org/drawingml/2006/main" xmlns:r="http://schemas.openxmlformats.org/officeDocument/2006/relationships">
-  <c:date1904 val="0"/>
-  <c:roundedCorners val="1"/>
-  <c:chart>
-    <c:title>
-      <c:tx>
-        <c:rich>
-          <a:bodyPr/>
-          <a:lstStyle/>
-          <a:p>
-            <a:pPr>
-              <a:defRPr sz="1300" b="0" i="0" u="none" strike="noStrike">
-                <a:solidFill>
-                  <a:srgbClr val="5A6272"/>
-                </a:solidFill>
-                <a:latin typeface="Arial"/>
-              </a:defRPr>
-            </a:pPr>
-            <a:r>
-              <a:rPr sz="1300" b="0" i="0" u="none" strike="noStrike">
-                <a:solidFill>
-                  <a:srgbClr val="5A6272"/>
-                </a:solidFill>
-                <a:latin typeface="Arial"/>
-              </a:rPr>
-              <a:t>Speedup over sequential (1.0 = no gain)</a:t>
-            </a:r>
-          </a:p>
-        </c:rich>
-      </c:tx>
-      <c:layout/>
-      <c:overlay val="0"/>
-    </c:title>
-    <c:autoTitleDeleted val="0"/>
-    <c:plotArea>
-      <c:layout/>
-      <c:barChart>
-        <c:barDir val="bar"/>
-        <c:grouping val="clustered"/>
-        <c:varyColors val="0"/>
-        <c:ser>
-          <c:idx val="0"/>
-          <c:order val="0"/>
-          <c:tx>
-            <c:strRef>
-              <c:f>Sheet1!$B$1</c:f>
-              <c:strCache>
-                <c:ptCount val="1"/>
-                <c:pt idx="0">
-                  <c:v>Block-STM, 6 threads</c:v>
-                </c:pt>
-              </c:strCache>
-            </c:strRef>
-          </c:tx>
-          <c:spPr>
-            <a:solidFill>
-              <a:srgbClr val="EB6834"/>
-            </a:solidFill>
-            <a:effectLst/>
-          </c:spPr>
-          <c:invertIfNegative val="0"/>
-          <c:dLbls>
-            <c:numFmt formatCode="0.00&quot;×&quot;" sourceLinked="0"/>
-            <c:txPr>
-              <a:bodyPr/>
-              <a:lstStyle/>
-              <a:p>
-                <a:pPr>
-                  <a:defRPr b="0" i="0" strike="noStrike" sz="1200" u="none">
-                    <a:solidFill>
-                      <a:srgbClr val="14181F"/>
-                    </a:solidFill>
-                    <a:latin typeface="Arial"/>
-                  </a:defRPr>
-                </a:pPr>
-              </a:p>
-            </c:txPr>
-            <c:showLegendKey val="0"/>
-            <c:showVal val="1"/>
-            <c:showCatName val="0"/>
-            <c:showSerName val="0"/>
-            <c:showPercent val="0"/>
-            <c:showBubbleSize val="0"/>
-            <c:showLeaderLines val="0"/>
-          </c:dLbls>
-          <c:cat>
-            <c:multiLvlStrRef>
-              <c:f>Sheet1!$A$2:$A$6</c:f>
-              <c:multiLvlStrCache>
-                <c:ptCount val="5"/>
-                <c:lvl>
-                  <c:pt idx="0">
-                    <c:v>compute-heavy, independent</c:v>
-                  </c:pt>
-                  <c:pt idx="1">
-                    <c:v>ERC-20, many holders</c:v>
-                  </c:pt>
-                  <c:pt idx="2">
-                    <c:v>ETH transfers, independent</c:v>
-                  </c:pt>
-                  <c:pt idx="3">
-                    <c:v>ERC-20, per-account detection</c:v>
-                  </c:pt>
-                  <c:pt idx="4">
-                    <c:v>NFT mint (one chain)</c:v>
-                  </c:pt>
-                </c:lvl>
-              </c:multiLvlStrCache>
-            </c:multiLvlStrRef>
-          </c:cat>
-          <c:val>
-            <c:numRef>
-              <c:f>Sheet1!$B$2:$B$6</c:f>
-              <c:numCache>
-                <c:formatCode>General</c:formatCode>
-                <c:ptCount val="5"/>
-                <c:pt idx="0">
-                  <c:v>5.58</c:v>
-                </c:pt>
-                <c:pt idx="1">
-                  <c:v>2.8</c:v>
-                </c:pt>
-                <c:pt idx="2">
-                  <c:v>1.41</c:v>
-                </c:pt>
-                <c:pt idx="3">
-                  <c:v>0.5</c:v>
-                </c:pt>
-                <c:pt idx="4">
-                  <c:v>0.43</c:v>
-                </c:pt>
-              </c:numCache>
-            </c:numRef>
-          </c:val>
-        </c:ser>
-        <c:dLbls>
-          <c:numFmt formatCode="0.00&quot;×&quot;" sourceLinked="0"/>
-          <c:txPr>
-            <a:bodyPr/>
-            <a:lstStyle/>
-            <a:p>
-              <a:pPr>
-                <a:defRPr b="0" i="0" strike="noStrike" sz="1200" u="none">
-                  <a:solidFill>
-                    <a:srgbClr val="14181F"/>
-                  </a:solidFill>
-                  <a:latin typeface="Arial"/>
-                </a:defRPr>
-              </a:pPr>
-            </a:p>
-          </c:txPr>
-          <c:showLegendKey val="0"/>
-          <c:showVal val="1"/>
-          <c:showCatName val="0"/>
-          <c:showSerName val="0"/>
-          <c:showPercent val="0"/>
-          <c:showBubbleSize val="0"/>
-          <c:showLeaderLines val="0"/>
-        </c:dLbls>
-        <c:gapWidth val="45"/>
-        <c:overlap val="0"/>
-        <c:axId val="2094734554"/>
-        <c:axId val="2094734552"/>
-        <c:axId val="2094734556"/>
-      </c:barChart>
-      <c:catAx>
-        <c:axId val="2094734554"/>
-        <c:scaling>
-          <c:orientation val="maxMin"/>
-        </c:scaling>
-        <c:delete val="0"/>
-        <c:axPos val="l"/>
-        <c:numFmt formatCode="General" sourceLinked="1"/>
-        <c:majorTickMark val="out"/>
-        <c:minorTickMark val="none"/>
-        <c:tickLblPos val="nextTo"/>
-        <c:spPr>
-          <a:ln w="12700" cap="flat">
-            <a:solidFill>
-              <a:srgbClr val="888888"/>
-            </a:solidFill>
-            <a:prstDash val="solid"/>
-            <a:round/>
-          </a:ln>
-        </c:spPr>
-        <c:txPr>
-          <a:bodyPr/>
-          <a:lstStyle/>
-          <a:p>
-            <a:pPr>
-              <a:defRPr sz="1200" b="0" i="0" u="none" strike="noStrike">
-                <a:solidFill>
-                  <a:srgbClr val="14181F"/>
-                </a:solidFill>
-                <a:latin typeface="Arial"/>
-              </a:defRPr>
-            </a:pPr>
-            <a:endParaRPr lang="en-US"/>
-          </a:p>
-        </c:txPr>
-        <c:crossAx val="2094734552"/>
-        <c:crosses val="autoZero"/>
-        <c:auto val="1"/>
-        <c:lblAlgn val="ctr"/>
-        <c:noMultiLvlLbl val="1"/>
-      </c:catAx>
-      <c:valAx>
-        <c:axId val="2094734552"/>
-        <c:scaling>
-          <c:orientation val="minMax"/>
-          <c:max val="6.5"/>
-          <c:min val="0"/>
-        </c:scaling>
-        <c:delete val="0"/>
-        <c:axPos val="b"/>
-        <c:majorGridlines>
-          <c:spPr>
-            <a:ln w="12700" cap="flat">
-              <a:solidFill>
-                <a:srgbClr val="E3E5EA"/>
-              </a:solidFill>
-              <a:prstDash val="solid"/>
-              <a:round/>
-            </a:ln>
-          </c:spPr>
-        </c:majorGridlines>
-        <c:numFmt formatCode="General" sourceLinked="0"/>
-        <c:majorTickMark val="out"/>
-        <c:minorTickMark val="none"/>
-        <c:tickLblPos val="low"/>
-        <c:spPr>
-          <a:ln w="12700" cap="flat">
-            <a:solidFill>
-              <a:srgbClr val="888888"/>
-            </a:solidFill>
-            <a:prstDash val="solid"/>
-            <a:round/>
-          </a:ln>
-        </c:spPr>
-        <c:txPr>
-          <a:bodyPr/>
-          <a:lstStyle/>
-          <a:p>
-            <a:pPr>
-              <a:defRPr sz="1100" b="0" i="0" u="none" strike="noStrike">
-                <a:solidFill>
-                  <a:srgbClr val="5A6272"/>
-                </a:solidFill>
-                <a:latin typeface="Arial"/>
-              </a:defRPr>
-            </a:pPr>
-            <a:endParaRPr lang="en-US"/>
-          </a:p>
-        </c:txPr>
-        <c:crossAx val="2094734554"/>
-        <c:crosses val="autoZero"/>
-        <c:crossBetween val="between"/>
-      </c:valAx>
-      <c:spPr>
-        <a:noFill/>
-        <a:ln>
-          <a:noFill/>
-        </a:ln>
-        <a:effectLst/>
-      </c:spPr>
-    </c:plotArea>
-    <c:plotVisOnly val="1"/>
-    <c:dispBlanksAs val="span"/>
-  </c:chart>
-  <c:spPr>
-    <a:noFill/>
-    <a:ln>
-      <a:noFill/>
-    </a:ln>
-    <a:effectLst/>
-  </c:spPr>
-  <c:externalData r:id="rId1">
-    <c:autoUpdate val="0"/>
-  </c:externalData>
-</c:chartSpace>
 </file>
 
 <file path=ppt/notesMasters/notesMaster1.xml><?xml version="1.0" encoding="utf-8"?>
@@ -3292,9 +2061,9 @@
                 <a:solidFill>
                   <a:srgbClr val="EB6834"/>
                 </a:solidFill>
-                <a:latin typeface="Calibri" pitchFamily="34" charset="0"/>
-                <a:ea typeface="Calibri" pitchFamily="34" charset="-122"/>
-                <a:cs typeface="Calibri" pitchFamily="34" charset="-120"/>
+                <a:latin typeface="Arial" pitchFamily="34" charset="0"/>
+                <a:ea typeface="Arial" pitchFamily="34" charset="-122"/>
+                <a:cs typeface="Arial" pitchFamily="34" charset="-120"/>
               </a:rPr>
               <a:t>SC6109 BLOCKCHAIN SCALABILITY · OPTION 5</a:t>
             </a:r>
@@ -3331,9 +2100,9 @@
                 <a:solidFill>
                   <a:srgbClr val="FFFFFF"/>
                 </a:solidFill>
-                <a:latin typeface="Calibri" pitchFamily="34" charset="0"/>
-                <a:ea typeface="Calibri" pitchFamily="34" charset="-122"/>
-                <a:cs typeface="Calibri" pitchFamily="34" charset="-120"/>
+                <a:latin typeface="Arial" pitchFamily="34" charset="0"/>
+                <a:ea typeface="Arial" pitchFamily="34" charset="-122"/>
+                <a:cs typeface="Arial" pitchFamily="34" charset="-120"/>
               </a:rPr>
               <a:t>When does parallel EVM execution pay?</a:t>
             </a:r>
@@ -3370,9 +2139,9 @@
                 <a:solidFill>
                   <a:srgbClr val="AEB6C8"/>
                 </a:solidFill>
-                <a:latin typeface="Calibri" pitchFamily="34" charset="0"/>
-                <a:ea typeface="Calibri" pitchFamily="34" charset="-122"/>
-                <a:cs typeface="Calibri" pitchFamily="34" charset="-120"/>
+                <a:latin typeface="Arial" pitchFamily="34" charset="0"/>
+                <a:ea typeface="Arial" pitchFamily="34" charset="-122"/>
+                <a:cs typeface="Arial" pitchFamily="34" charset="-120"/>
               </a:rPr>
               <a:t>A Block-STM engine over real EVM bytecode — three schedulers, twenty workloads, and the cases where parallelism makes things slower.</a:t>
             </a:r>
@@ -3436,9 +2205,9 @@
                 <a:solidFill>
                   <a:srgbClr val="1BAF7A"/>
                 </a:solidFill>
-                <a:latin typeface="Calibri" pitchFamily="34" charset="0"/>
-                <a:ea typeface="Calibri" pitchFamily="34" charset="-122"/>
-                <a:cs typeface="Calibri" pitchFamily="34" charset="-120"/>
+                <a:latin typeface="Arial" pitchFamily="34" charset="0"/>
+                <a:ea typeface="Arial" pitchFamily="34" charset="-122"/>
+                <a:cs typeface="Arial" pitchFamily="34" charset="-120"/>
               </a:rPr>
               <a:t>5.6×</a:t>
             </a:r>
@@ -3475,9 +2244,9 @@
                 <a:solidFill>
                   <a:srgbClr val="AEB6C8"/>
                 </a:solidFill>
-                <a:latin typeface="Calibri" pitchFamily="34" charset="0"/>
-                <a:ea typeface="Calibri" pitchFamily="34" charset="-122"/>
-                <a:cs typeface="Calibri" pitchFamily="34" charset="-120"/>
+                <a:latin typeface="Arial" pitchFamily="34" charset="0"/>
+                <a:ea typeface="Arial" pitchFamily="34" charset="-122"/>
+                <a:cs typeface="Arial" pitchFamily="34" charset="-120"/>
               </a:rPr>
               <a:t>independent, compute-heavy</a:t>
             </a:r>
@@ -3541,9 +2310,9 @@
                 <a:solidFill>
                   <a:srgbClr val="EB6834"/>
                 </a:solidFill>
-                <a:latin typeface="Calibri" pitchFamily="34" charset="0"/>
-                <a:ea typeface="Calibri" pitchFamily="34" charset="-122"/>
-                <a:cs typeface="Calibri" pitchFamily="34" charset="-120"/>
+                <a:latin typeface="Arial" pitchFamily="34" charset="0"/>
+                <a:ea typeface="Arial" pitchFamily="34" charset="-122"/>
+                <a:cs typeface="Arial" pitchFamily="34" charset="-120"/>
               </a:rPr>
               <a:t>0.43×</a:t>
             </a:r>
@@ -3580,9 +2349,9 @@
                 <a:solidFill>
                   <a:srgbClr val="AEB6C8"/>
                 </a:solidFill>
-                <a:latin typeface="Calibri" pitchFamily="34" charset="0"/>
-                <a:ea typeface="Calibri" pitchFamily="34" charset="-122"/>
-                <a:cs typeface="Calibri" pitchFamily="34" charset="-120"/>
+                <a:latin typeface="Arial" pitchFamily="34" charset="0"/>
+                <a:ea typeface="Arial" pitchFamily="34" charset="-122"/>
+                <a:cs typeface="Arial" pitchFamily="34" charset="-120"/>
               </a:rPr>
               <a:t>one NFT mint, one dependency chain</a:t>
             </a:r>
@@ -3619,9 +2388,9 @@
                 <a:solidFill>
                   <a:srgbClr val="AEB6C8"/>
                 </a:solidFill>
-                <a:latin typeface="Calibri" pitchFamily="34" charset="0"/>
-                <a:ea typeface="Calibri" pitchFamily="34" charset="-122"/>
-                <a:cs typeface="Calibri" pitchFamily="34" charset="-120"/>
+                <a:latin typeface="Arial" pitchFamily="34" charset="0"/>
+                <a:ea typeface="Arial" pitchFamily="34" charset="-122"/>
+                <a:cs typeface="Arial" pitchFamily="34" charset="-120"/>
               </a:rPr>
               <a:t>Block-STM, 6 performance cores, vs. sequential</a:t>
             </a:r>
@@ -3690,9 +2459,9 @@
                 <a:solidFill>
                   <a:srgbClr val="EB6834"/>
                 </a:solidFill>
-                <a:latin typeface="Calibri" pitchFamily="34" charset="0"/>
-                <a:ea typeface="Calibri" pitchFamily="34" charset="-122"/>
-                <a:cs typeface="Calibri" pitchFamily="34" charset="-120"/>
+                <a:latin typeface="Arial" pitchFamily="34" charset="0"/>
+                <a:ea typeface="Arial" pitchFamily="34" charset="-122"/>
+                <a:cs typeface="Arial" pitchFamily="34" charset="-120"/>
               </a:rPr>
               <a:t>RESULT 4</a:t>
             </a:r>
@@ -3725,17 +2494,17 @@
               <a:buNone/>
             </a:pPr>
             <a:r>
-              <a:rPr lang="en-US" sz="3200" b="1" dirty="0">
+              <a:rPr lang="en-US" sz="2800" b="1" dirty="0">
                 <a:solidFill>
                   <a:srgbClr val="14181F"/>
                 </a:solidFill>
-                <a:latin typeface="Calibri" pitchFamily="34" charset="0"/>
-                <a:ea typeface="Calibri" pitchFamily="34" charset="-122"/>
-                <a:cs typeface="Calibri" pitchFamily="34" charset="-120"/>
+                <a:latin typeface="Arial" pitchFamily="34" charset="0"/>
+                <a:ea typeface="Arial" pitchFamily="34" charset="-122"/>
+                <a:cs typeface="Arial" pitchFamily="34" charset="-120"/>
               </a:rPr>
               <a:t>The scheduler matters as much as the workload</a:t>
             </a:r>
-            <a:endParaRPr lang="en-US" sz="3200" dirty="0"/>
+            <a:endParaRPr lang="en-US" sz="2800" dirty="0"/>
           </a:p>
         </p:txBody>
       </p:sp>
@@ -3792,9 +2561,9 @@
                 <a:solidFill>
                   <a:srgbClr val="2A78D6"/>
                 </a:solidFill>
-                <a:latin typeface="Calibri" pitchFamily="34" charset="0"/>
-                <a:ea typeface="Calibri" pitchFamily="34" charset="-122"/>
-                <a:cs typeface="Calibri" pitchFamily="34" charset="-120"/>
+                <a:latin typeface="Arial" pitchFamily="34" charset="0"/>
+                <a:ea typeface="Arial" pitchFamily="34" charset="-122"/>
+                <a:cs typeface="Arial" pitchFamily="34" charset="-120"/>
               </a:rPr>
               <a:t>247×</a:t>
             </a:r>
@@ -3831,9 +2600,9 @@
                 <a:solidFill>
                   <a:srgbClr val="5A6272"/>
                 </a:solidFill>
-                <a:latin typeface="Calibri" pitchFamily="34" charset="0"/>
-                <a:ea typeface="Calibri" pitchFamily="34" charset="-122"/>
-                <a:cs typeface="Calibri" pitchFamily="34" charset="-120"/>
+                <a:latin typeface="Arial" pitchFamily="34" charset="0"/>
+                <a:ea typeface="Arial" pitchFamily="34" charset="-122"/>
+                <a:cs typeface="Arial" pitchFamily="34" charset="-120"/>
               </a:rPr>
               <a:t>executions per transaction on an NFT mint under round-based execution — speedup 0.01×</a:t>
             </a:r>
@@ -3870,9 +2639,9 @@
                 <a:solidFill>
                   <a:srgbClr val="EB6834"/>
                 </a:solidFill>
-                <a:latin typeface="Calibri" pitchFamily="34" charset="0"/>
-                <a:ea typeface="Calibri" pitchFamily="34" charset="-122"/>
-                <a:cs typeface="Calibri" pitchFamily="34" charset="-120"/>
+                <a:latin typeface="Arial" pitchFamily="34" charset="0"/>
+                <a:ea typeface="Arial" pitchFamily="34" charset="-122"/>
+                <a:cs typeface="Arial" pitchFamily="34" charset="-120"/>
               </a:rPr>
               <a:t>1.9×</a:t>
             </a:r>
@@ -3909,9 +2678,9 @@
                 <a:solidFill>
                   <a:srgbClr val="5A6272"/>
                 </a:solidFill>
-                <a:latin typeface="Calibri" pitchFamily="34" charset="0"/>
-                <a:ea typeface="Calibri" pitchFamily="34" charset="-122"/>
-                <a:cs typeface="Calibri" pitchFamily="34" charset="-120"/>
+                <a:latin typeface="Arial" pitchFamily="34" charset="0"/>
+                <a:ea typeface="Arial" pitchFamily="34" charset="-122"/>
+                <a:cs typeface="Arial" pitchFamily="34" charset="-120"/>
               </a:rPr>
               <a:t>under Block-STM on the same block — parking waiting transactions instead of re-running them</a:t>
             </a:r>
@@ -3948,9 +2717,9 @@
                 <a:solidFill>
                   <a:srgbClr val="5A6272"/>
                 </a:solidFill>
-                <a:latin typeface="Calibri" pitchFamily="34" charset="0"/>
-                <a:ea typeface="Calibri" pitchFamily="34" charset="-122"/>
-                <a:cs typeface="Calibri" pitchFamily="34" charset="-120"/>
+                <a:latin typeface="Arial" pitchFamily="34" charset="0"/>
+                <a:ea typeface="Arial" pitchFamily="34" charset="-122"/>
+                <a:cs typeface="Arial" pitchFamily="34" charset="-120"/>
               </a:rPr>
               <a:t>6 threads. At low density both run each transaction about once.</a:t>
             </a:r>
@@ -4019,9 +2788,9 @@
                 <a:solidFill>
                   <a:srgbClr val="EB6834"/>
                 </a:solidFill>
-                <a:latin typeface="Calibri" pitchFamily="34" charset="0"/>
-                <a:ea typeface="Calibri" pitchFamily="34" charset="-122"/>
-                <a:cs typeface="Calibri" pitchFamily="34" charset="-120"/>
+                <a:latin typeface="Arial" pitchFamily="34" charset="0"/>
+                <a:ea typeface="Arial" pitchFamily="34" charset="-122"/>
+                <a:cs typeface="Arial" pitchFamily="34" charset="-120"/>
               </a:rPr>
               <a:t>RESULT 5</a:t>
             </a:r>
@@ -4054,36 +2823,44 @@
               <a:buNone/>
             </a:pPr>
             <a:r>
-              <a:rPr lang="en-US" sz="3200" b="1" dirty="0">
+              <a:rPr lang="en-US" sz="2800" b="1" dirty="0">
                 <a:solidFill>
                   <a:srgbClr val="14181F"/>
                 </a:solidFill>
-                <a:latin typeface="Calibri" pitchFamily="34" charset="0"/>
-                <a:ea typeface="Calibri" pitchFamily="34" charset="-122"/>
-                <a:cs typeface="Calibri" pitchFamily="34" charset="-120"/>
+                <a:latin typeface="Arial" pitchFamily="34" charset="0"/>
+                <a:ea typeface="Arial" pitchFamily="34" charset="-122"/>
+                <a:cs typeface="Arial" pitchFamily="34" charset="-120"/>
               </a:rPr>
               <a:t>Per-account conflict detection throws ERC-20 parallelism away</a:t>
             </a:r>
-            <a:endParaRPr lang="en-US" sz="3200" dirty="0"/>
-          </a:p>
-        </p:txBody>
-      </p:sp>
-      <p:graphicFrame>
-        <p:nvGraphicFramePr>
-          <p:cNvPr id="4" name="Chart 0" descr=""/>
-          <p:cNvGraphicFramePr/>
-          <p:nvPr/>
-        </p:nvGraphicFramePr>
-        <p:xfrm>
-          <a:off x="548640" y="1371600"/>
-          <a:ext cx="6949440" cy="4754880"/>
-        </p:xfrm>
-        <a:graphic xmlns:a="http://schemas.openxmlformats.org/drawingml/2006/main">
-          <a:graphicData uri="http://schemas.openxmlformats.org/drawingml/2006/chart">
-            <c:chart xmlns:c="http://schemas.openxmlformats.org/drawingml/2006/chart" r:id="rId1"/>
-          </a:graphicData>
-        </a:graphic>
-      </p:graphicFrame>
+            <a:endParaRPr lang="en-US" sz="2800" dirty="0"/>
+          </a:p>
+        </p:txBody>
+      </p:sp>
+      <p:pic>
+        <p:nvPicPr>
+          <p:cNvPr id="4" name="Image 0" descr="/Users/franz/Desktop/SC6109/docs/figures/slide_granularity_erc20.png">    </p:cNvPr>
+          <p:cNvPicPr>
+            <a:picLocks noChangeAspect="1"/>
+          </p:cNvPicPr>
+          <p:nvPr/>
+        </p:nvPicPr>
+        <p:blipFill>
+          <a:blip r:embed="rId1"/>
+          <a:stretch>
+            <a:fillRect/>
+          </a:stretch>
+        </p:blipFill>
+        <p:spPr>
+          <a:xfrm>
+            <a:off x="548640" y="1371600"/>
+            <a:ext cx="6949440" cy="4705105"/>
+          </a:xfrm>
+          <a:prstGeom prst="rect">
+            <a:avLst/>
+          </a:prstGeom>
+        </p:spPr>
+      </p:pic>
       <p:sp>
         <p:nvSpPr>
           <p:cNvPr id="5" name="Text 2"/>
@@ -4116,9 +2893,9 @@
                 <a:solidFill>
                   <a:srgbClr val="14181F"/>
                 </a:solidFill>
-                <a:latin typeface="Calibri" pitchFamily="34" charset="0"/>
-                <a:ea typeface="Calibri" pitchFamily="34" charset="-122"/>
-                <a:cs typeface="Calibri" pitchFamily="34" charset="-120"/>
+                <a:latin typeface="Arial" pitchFamily="34" charset="0"/>
+                <a:ea typeface="Arial" pitchFamily="34" charset="-122"/>
+                <a:cs typeface="Arial" pitchFamily="34" charset="-120"/>
               </a:rPr>
               <a:t>Why</a:t>
             </a:r>
@@ -4158,9 +2935,9 @@
                 <a:solidFill>
                   <a:srgbClr val="14181F"/>
                 </a:solidFill>
-                <a:latin typeface="Calibri" pitchFamily="34" charset="0"/>
-                <a:ea typeface="Calibri" pitchFamily="34" charset="-122"/>
-                <a:cs typeface="Calibri" pitchFamily="34" charset="-120"/>
+                <a:latin typeface="Arial" pitchFamily="34" charset="0"/>
+                <a:ea typeface="Arial" pitchFamily="34" charset="-122"/>
+                <a:cs typeface="Arial" pitchFamily="34" charset="-120"/>
               </a:rPr>
               <a:t>Every ERC-20 balance is a storage slot in the token contract. Per slot, transfers between different holders never collide. Per account, they all collide in one account — the token.</a:t>
             </a:r>
@@ -4200,9 +2977,9 @@
                 <a:solidFill>
                   <a:srgbClr val="14181F"/>
                 </a:solidFill>
-                <a:latin typeface="Calibri" pitchFamily="34" charset="0"/>
-                <a:ea typeface="Calibri" pitchFamily="34" charset="-122"/>
-                <a:cs typeface="Calibri" pitchFamily="34" charset="-120"/>
+                <a:latin typeface="Arial" pitchFamily="34" charset="0"/>
+                <a:ea typeface="Arial" pitchFamily="34" charset="-122"/>
+                <a:cs typeface="Arial" pitchFamily="34" charset="-120"/>
               </a:rPr>
               <a:t>So what</a:t>
             </a:r>
@@ -4242,9 +3019,9 @@
                 <a:solidFill>
                   <a:srgbClr val="14181F"/>
                 </a:solidFill>
-                <a:latin typeface="Calibri" pitchFamily="34" charset="0"/>
-                <a:ea typeface="Calibri" pitchFamily="34" charset="-122"/>
-                <a:cs typeface="Calibri" pitchFamily="34" charset="-120"/>
+                <a:latin typeface="Arial" pitchFamily="34" charset="0"/>
+                <a:ea typeface="Arial" pitchFamily="34" charset="-122"/>
+                <a:cs typeface="Arial" pitchFamily="34" charset="-120"/>
               </a:rPr>
               <a:t>An access-list design is only as good as its granularity. EIP-7928 lists storage keys; an account-level list would not work for contracts. Plain ETH transfers — accounts without storage — are identical under both, as they should be.</a:t>
             </a:r>
@@ -4313,9 +3090,9 @@
                 <a:solidFill>
                   <a:srgbClr val="EB6834"/>
                 </a:solidFill>
-                <a:latin typeface="Calibri" pitchFamily="34" charset="0"/>
-                <a:ea typeface="Calibri" pitchFamily="34" charset="-122"/>
-                <a:cs typeface="Calibri" pitchFamily="34" charset="-120"/>
+                <a:latin typeface="Arial" pitchFamily="34" charset="0"/>
+                <a:ea typeface="Arial" pitchFamily="34" charset="-122"/>
+                <a:cs typeface="Arial" pitchFamily="34" charset="-120"/>
               </a:rPr>
               <a:t>THE ANSWER</a:t>
             </a:r>
@@ -4348,36 +3125,44 @@
               <a:buNone/>
             </a:pPr>
             <a:r>
-              <a:rPr lang="en-US" sz="3200" b="1" dirty="0">
+              <a:rPr lang="en-US" sz="2800" b="1" dirty="0">
                 <a:solidFill>
                   <a:srgbClr val="14181F"/>
                 </a:solidFill>
-                <a:latin typeface="Calibri" pitchFamily="34" charset="0"/>
-                <a:ea typeface="Calibri" pitchFamily="34" charset="-122"/>
-                <a:cs typeface="Calibri" pitchFamily="34" charset="-120"/>
+                <a:latin typeface="Arial" pitchFamily="34" charset="0"/>
+                <a:ea typeface="Arial" pitchFamily="34" charset="-122"/>
+                <a:cs typeface="Arial" pitchFamily="34" charset="-120"/>
               </a:rPr>
               <a:t>Parallel execution pays only when all three hold</a:t>
             </a:r>
-            <a:endParaRPr lang="en-US" sz="3200" dirty="0"/>
-          </a:p>
-        </p:txBody>
-      </p:sp>
-      <p:graphicFrame>
-        <p:nvGraphicFramePr>
-          <p:cNvPr id="4" name="Chart 0" descr=""/>
-          <p:cNvGraphicFramePr/>
-          <p:nvPr/>
-        </p:nvGraphicFramePr>
-        <p:xfrm>
-          <a:off x="548640" y="1371600"/>
-          <a:ext cx="6035040" cy="4663440"/>
-        </p:xfrm>
-        <a:graphic xmlns:a="http://schemas.openxmlformats.org/drawingml/2006/main">
-          <a:graphicData uri="http://schemas.openxmlformats.org/drawingml/2006/chart">
-            <c:chart xmlns:c="http://schemas.openxmlformats.org/drawingml/2006/chart" r:id="rId1"/>
-          </a:graphicData>
-        </a:graphic>
-      </p:graphicFrame>
+            <a:endParaRPr lang="en-US" sz="2800" dirty="0"/>
+          </a:p>
+        </p:txBody>
+      </p:sp>
+      <p:pic>
+        <p:nvPicPr>
+          <p:cNvPr id="4" name="Image 0" descr="/Users/franz/Desktop/SC6109/docs/figures/slide_answer_bars.png">    </p:cNvPr>
+          <p:cNvPicPr>
+            <a:picLocks noChangeAspect="1"/>
+          </p:cNvPicPr>
+          <p:nvPr/>
+        </p:nvPicPr>
+        <p:blipFill>
+          <a:blip r:embed="rId1"/>
+          <a:stretch>
+            <a:fillRect/>
+          </a:stretch>
+        </p:blipFill>
+        <p:spPr>
+          <a:xfrm>
+            <a:off x="548640" y="1417320"/>
+            <a:ext cx="6035040" cy="4613945"/>
+          </a:xfrm>
+          <a:prstGeom prst="rect">
+            <a:avLst/>
+          </a:prstGeom>
+        </p:spPr>
+      </p:pic>
       <p:sp>
         <p:nvSpPr>
           <p:cNvPr id="5" name="Shape 2"/>
@@ -4434,9 +3219,9 @@
                 <a:solidFill>
                   <a:srgbClr val="FFFFFF"/>
                 </a:solidFill>
-                <a:latin typeface="Calibri" pitchFamily="34" charset="0"/>
-                <a:ea typeface="Calibri" pitchFamily="34" charset="-122"/>
-                <a:cs typeface="Calibri" pitchFamily="34" charset="-120"/>
+                <a:latin typeface="Arial" pitchFamily="34" charset="0"/>
+                <a:ea typeface="Arial" pitchFamily="34" charset="-122"/>
+                <a:cs typeface="Arial" pitchFamily="34" charset="-120"/>
               </a:rPr>
               <a:t>1</a:t>
             </a:r>
@@ -4473,9 +3258,9 @@
                 <a:solidFill>
                   <a:srgbClr val="14181F"/>
                 </a:solidFill>
-                <a:latin typeface="Calibri" pitchFamily="34" charset="0"/>
-                <a:ea typeface="Calibri" pitchFamily="34" charset="-122"/>
-                <a:cs typeface="Calibri" pitchFamily="34" charset="-120"/>
+                <a:latin typeface="Arial" pitchFamily="34" charset="0"/>
+                <a:ea typeface="Arial" pitchFamily="34" charset="-122"/>
+                <a:cs typeface="Arial" pitchFamily="34" charset="-120"/>
               </a:rPr>
               <a:t>Short dependency chains</a:t>
             </a:r>
@@ -4515,9 +3300,9 @@
                 <a:solidFill>
                   <a:srgbClr val="5A6272"/>
                 </a:solidFill>
-                <a:latin typeface="Calibri" pitchFamily="34" charset="0"/>
-                <a:ea typeface="Calibri" pitchFamily="34" charset="-122"/>
-                <a:cs typeface="Calibri" pitchFamily="34" charset="-120"/>
+                <a:latin typeface="Arial" pitchFamily="34" charset="0"/>
+                <a:ea typeface="Arial" pitchFamily="34" charset="-122"/>
+                <a:cs typeface="Arial" pitchFamily="34" charset="-120"/>
               </a:rPr>
               <a:t>A hot contract is a ceiling no engine removes — only the application can shard it.</a:t>
             </a:r>
@@ -4581,9 +3366,9 @@
                 <a:solidFill>
                   <a:srgbClr val="FFFFFF"/>
                 </a:solidFill>
-                <a:latin typeface="Calibri" pitchFamily="34" charset="0"/>
-                <a:ea typeface="Calibri" pitchFamily="34" charset="-122"/>
-                <a:cs typeface="Calibri" pitchFamily="34" charset="-120"/>
+                <a:latin typeface="Arial" pitchFamily="34" charset="0"/>
+                <a:ea typeface="Arial" pitchFamily="34" charset="-122"/>
+                <a:cs typeface="Arial" pitchFamily="34" charset="-120"/>
               </a:rPr>
               <a:t>2</a:t>
             </a:r>
@@ -4620,9 +3405,9 @@
                 <a:solidFill>
                   <a:srgbClr val="14181F"/>
                 </a:solidFill>
-                <a:latin typeface="Calibri" pitchFamily="34" charset="0"/>
-                <a:ea typeface="Calibri" pitchFamily="34" charset="-122"/>
-                <a:cs typeface="Calibri" pitchFamily="34" charset="-120"/>
+                <a:latin typeface="Arial" pitchFamily="34" charset="0"/>
+                <a:ea typeface="Arial" pitchFamily="34" charset="-122"/>
+                <a:cs typeface="Arial" pitchFamily="34" charset="-120"/>
               </a:rPr>
               <a:t>Real work per transaction</a:t>
             </a:r>
@@ -4662,9 +3447,9 @@
                 <a:solidFill>
                   <a:srgbClr val="5A6272"/>
                 </a:solidFill>
-                <a:latin typeface="Calibri" pitchFamily="34" charset="0"/>
-                <a:ea typeface="Calibri" pitchFamily="34" charset="-122"/>
-                <a:cs typeface="Calibri" pitchFamily="34" charset="-120"/>
+                <a:latin typeface="Arial" pitchFamily="34" charset="0"/>
+                <a:ea typeface="Arial" pitchFamily="34" charset="-122"/>
+                <a:cs typeface="Arial" pitchFamily="34" charset="-120"/>
               </a:rPr>
               <a:t>Coordination costs a roughly fixed amount; light transactions never earn it back.</a:t>
             </a:r>
@@ -4728,9 +3513,9 @@
                 <a:solidFill>
                   <a:srgbClr val="FFFFFF"/>
                 </a:solidFill>
-                <a:latin typeface="Calibri" pitchFamily="34" charset="0"/>
-                <a:ea typeface="Calibri" pitchFamily="34" charset="-122"/>
-                <a:cs typeface="Calibri" pitchFamily="34" charset="-120"/>
+                <a:latin typeface="Arial" pitchFamily="34" charset="0"/>
+                <a:ea typeface="Arial" pitchFamily="34" charset="-122"/>
+                <a:cs typeface="Arial" pitchFamily="34" charset="-120"/>
               </a:rPr>
               <a:t>3</a:t>
             </a:r>
@@ -4767,9 +3552,9 @@
                 <a:solidFill>
                   <a:srgbClr val="14181F"/>
                 </a:solidFill>
-                <a:latin typeface="Calibri" pitchFamily="34" charset="0"/>
-                <a:ea typeface="Calibri" pitchFamily="34" charset="-122"/>
-                <a:cs typeface="Calibri" pitchFamily="34" charset="-120"/>
+                <a:latin typeface="Arial" pitchFamily="34" charset="0"/>
+                <a:ea typeface="Arial" pitchFamily="34" charset="-122"/>
+                <a:cs typeface="Arial" pitchFamily="34" charset="-120"/>
               </a:rPr>
               <a:t>Fine-grained conflicts, real cores</a:t>
             </a:r>
@@ -4809,9 +3594,9 @@
                 <a:solidFill>
                   <a:srgbClr val="5A6272"/>
                 </a:solidFill>
-                <a:latin typeface="Calibri" pitchFamily="34" charset="0"/>
-                <a:ea typeface="Calibri" pitchFamily="34" charset="-122"/>
-                <a:cs typeface="Calibri" pitchFamily="34" charset="-120"/>
+                <a:latin typeface="Arial" pitchFamily="34" charset="0"/>
+                <a:ea typeface="Arial" pitchFamily="34" charset="-122"/>
+                <a:cs typeface="Arial" pitchFamily="34" charset="-120"/>
               </a:rPr>
               <a:t>Per-slot detection, and no more threads than performance cores for light work.</a:t>
             </a:r>
@@ -4880,9 +3665,9 @@
                 <a:solidFill>
                   <a:srgbClr val="EB6834"/>
                 </a:solidFill>
-                <a:latin typeface="Calibri" pitchFamily="34" charset="0"/>
-                <a:ea typeface="Calibri" pitchFamily="34" charset="-122"/>
-                <a:cs typeface="Calibri" pitchFamily="34" charset="-120"/>
+                <a:latin typeface="Arial" pitchFamily="34" charset="0"/>
+                <a:ea typeface="Arial" pitchFamily="34" charset="-122"/>
+                <a:cs typeface="Arial" pitchFamily="34" charset="-120"/>
               </a:rPr>
               <a:t>IN CONTEXT</a:t>
             </a:r>
@@ -4915,17 +3700,17 @@
               <a:buNone/>
             </a:pPr>
             <a:r>
-              <a:rPr lang="en-US" sz="3200" b="1" dirty="0">
+              <a:rPr lang="en-US" sz="2800" b="1" dirty="0">
                 <a:solidFill>
                   <a:srgbClr val="14181F"/>
                 </a:solidFill>
-                <a:latin typeface="Calibri" pitchFamily="34" charset="0"/>
-                <a:ea typeface="Calibri" pitchFamily="34" charset="-122"/>
-                <a:cs typeface="Calibri" pitchFamily="34" charset="-120"/>
+                <a:latin typeface="Arial" pitchFamily="34" charset="0"/>
+                <a:ea typeface="Arial" pitchFamily="34" charset="-122"/>
+                <a:cs typeface="Arial" pitchFamily="34" charset="-120"/>
               </a:rPr>
               <a:t>How this maps onto production systems</a:t>
             </a:r>
-            <a:endParaRPr lang="en-US" sz="3200" dirty="0"/>
+            <a:endParaRPr lang="en-US" sz="2800" dirty="0"/>
           </a:p>
         </p:txBody>
       </p:sp>
@@ -5010,9 +3795,9 @@
                 <a:solidFill>
                   <a:srgbClr val="14181F"/>
                 </a:solidFill>
-                <a:latin typeface="Calibri" pitchFamily="34" charset="0"/>
-                <a:ea typeface="Calibri" pitchFamily="34" charset="-122"/>
-                <a:cs typeface="Calibri" pitchFamily="34" charset="-120"/>
+                <a:latin typeface="Arial" pitchFamily="34" charset="0"/>
+                <a:ea typeface="Arial" pitchFamily="34" charset="-122"/>
+                <a:cs typeface="Arial" pitchFamily="34" charset="-120"/>
               </a:rPr>
               <a:t>Aptos · Block-STM</a:t>
             </a:r>
@@ -5052,9 +3837,9 @@
                 <a:solidFill>
                   <a:srgbClr val="14181F"/>
                 </a:solidFill>
-                <a:latin typeface="Calibri" pitchFamily="34" charset="0"/>
-                <a:ea typeface="Calibri" pitchFamily="34" charset="-122"/>
-                <a:cs typeface="Calibri" pitchFamily="34" charset="-120"/>
+                <a:latin typeface="Arial" pitchFamily="34" charset="0"/>
+                <a:ea typeface="Arial" pitchFamily="34" charset="-122"/>
+                <a:cs typeface="Arial" pitchFamily="34" charset="-120"/>
               </a:rPr>
               <a:t>Our M2b follows the Block-STM paper on EVM bytecode instead of Move, and shows the same shape: large gains at low contention, graceful degradation, no collapse.</a:t>
             </a:r>
@@ -5143,9 +3928,9 @@
                 <a:solidFill>
                   <a:srgbClr val="14181F"/>
                 </a:solidFill>
-                <a:latin typeface="Calibri" pitchFamily="34" charset="0"/>
-                <a:ea typeface="Calibri" pitchFamily="34" charset="-122"/>
-                <a:cs typeface="Calibri" pitchFamily="34" charset="-120"/>
+                <a:latin typeface="Arial" pitchFamily="34" charset="0"/>
+                <a:ea typeface="Arial" pitchFamily="34" charset="-122"/>
+                <a:cs typeface="Arial" pitchFamily="34" charset="-120"/>
               </a:rPr>
               <a:t>Solana · Sealevel</a:t>
             </a:r>
@@ -5185,9 +3970,9 @@
                 <a:solidFill>
                   <a:srgbClr val="14181F"/>
                 </a:solidFill>
-                <a:latin typeface="Calibri" pitchFamily="34" charset="0"/>
-                <a:ea typeface="Calibri" pitchFamily="34" charset="-122"/>
-                <a:cs typeface="Calibri" pitchFamily="34" charset="-120"/>
+                <a:latin typeface="Arial" pitchFamily="34" charset="0"/>
+                <a:ea typeface="Arial" pitchFamily="34" charset="-122"/>
+                <a:cs typeface="Arial" pitchFamily="34" charset="-120"/>
               </a:rPr>
               <a:t>Transactions declare the accounts they touch. On the EVM that is account-level detection — which our ERC-20 result shows discards most of the parallelism.</a:t>
             </a:r>
@@ -5276,9 +4061,9 @@
                 <a:solidFill>
                   <a:srgbClr val="14181F"/>
                 </a:solidFill>
-                <a:latin typeface="Calibri" pitchFamily="34" charset="0"/>
-                <a:ea typeface="Calibri" pitchFamily="34" charset="-122"/>
-                <a:cs typeface="Calibri" pitchFamily="34" charset="-120"/>
+                <a:latin typeface="Arial" pitchFamily="34" charset="0"/>
+                <a:ea typeface="Arial" pitchFamily="34" charset="-122"/>
+                <a:cs typeface="Arial" pitchFamily="34" charset="-120"/>
               </a:rPr>
               <a:t>Ethereum · EIP-7928</a:t>
             </a:r>
@@ -5318,9 +4103,9 @@
                 <a:solidFill>
                   <a:srgbClr val="14181F"/>
                 </a:solidFill>
-                <a:latin typeface="Calibri" pitchFamily="34" charset="0"/>
-                <a:ea typeface="Calibri" pitchFamily="34" charset="-122"/>
-                <a:cs typeface="Calibri" pitchFamily="34" charset="-120"/>
+                <a:latin typeface="Arial" pitchFamily="34" charset="0"/>
+                <a:ea typeface="Arial" pitchFamily="34" charset="-122"/>
+                <a:cs typeface="Arial" pitchFamily="34" charset="-120"/>
               </a:rPr>
               <a:t>Builders publish block access lists with storage keys, so validators can schedule statically. Our M3 is that validator; its list costs a full execution, paid once by the builder.</a:t>
             </a:r>
@@ -5409,9 +4194,9 @@
                 <a:solidFill>
                   <a:srgbClr val="14181F"/>
                 </a:solidFill>
-                <a:latin typeface="Calibri" pitchFamily="34" charset="0"/>
-                <a:ea typeface="Calibri" pitchFamily="34" charset="-122"/>
-                <a:cs typeface="Calibri" pitchFamily="34" charset="-120"/>
+                <a:latin typeface="Arial" pitchFamily="34" charset="0"/>
+                <a:ea typeface="Arial" pitchFamily="34" charset="-122"/>
+                <a:cs typeface="Arial" pitchFamily="34" charset="-120"/>
               </a:rPr>
               <a:t>ERC-4337 bundles</a:t>
             </a:r>
@@ -5451,9 +4236,9 @@
                 <a:solidFill>
                   <a:srgbClr val="14181F"/>
                 </a:solidFill>
-                <a:latin typeface="Calibri" pitchFamily="34" charset="0"/>
-                <a:ea typeface="Calibri" pitchFamily="34" charset="-122"/>
-                <a:cs typeface="Calibri" pitchFamily="34" charset="-120"/>
+                <a:latin typeface="Arial" pitchFamily="34" charset="0"/>
+                <a:ea typeface="Arial" pitchFamily="34" charset="-122"/>
+                <a:cs typeface="Arial" pitchFamily="34" charset="-120"/>
               </a:rPr>
               <a:t>Many users' operations in one transaction through one EntryPoint — concentrating state, which is the unfavourable case for parallel execution.</a:t>
             </a:r>
@@ -5522,9 +4307,9 @@
                 <a:solidFill>
                   <a:srgbClr val="EB6834"/>
                 </a:solidFill>
-                <a:latin typeface="Calibri" pitchFamily="34" charset="0"/>
-                <a:ea typeface="Calibri" pitchFamily="34" charset="-122"/>
-                <a:cs typeface="Calibri" pitchFamily="34" charset="-120"/>
+                <a:latin typeface="Arial" pitchFamily="34" charset="0"/>
+                <a:ea typeface="Arial" pitchFamily="34" charset="-122"/>
+                <a:cs typeface="Arial" pitchFamily="34" charset="-120"/>
               </a:rPr>
               <a:t>LIMITS AND NEXT STEPS</a:t>
             </a:r>
@@ -5557,17 +4342,17 @@
               <a:buNone/>
             </a:pPr>
             <a:r>
-              <a:rPr lang="en-US" sz="3200" b="1" dirty="0">
+              <a:rPr lang="en-US" sz="2800" b="1" dirty="0">
                 <a:solidFill>
                   <a:srgbClr val="FFFFFF"/>
                 </a:solidFill>
-                <a:latin typeface="Calibri" pitchFamily="34" charset="0"/>
-                <a:ea typeface="Calibri" pitchFamily="34" charset="-122"/>
-                <a:cs typeface="Calibri" pitchFamily="34" charset="-120"/>
+                <a:latin typeface="Arial" pitchFamily="34" charset="0"/>
+                <a:ea typeface="Arial" pitchFamily="34" charset="-122"/>
+                <a:cs typeface="Arial" pitchFamily="34" charset="-120"/>
               </a:rPr>
               <a:t>What we would do next</a:t>
             </a:r>
-            <a:endParaRPr lang="en-US" sz="3200" dirty="0"/>
+            <a:endParaRPr lang="en-US" sz="2800" dirty="0"/>
           </a:p>
         </p:txBody>
       </p:sp>
@@ -5627,9 +4412,9 @@
                 <a:solidFill>
                   <a:srgbClr val="FFFFFF"/>
                 </a:solidFill>
-                <a:latin typeface="Calibri" pitchFamily="34" charset="0"/>
-                <a:ea typeface="Calibri" pitchFamily="34" charset="-122"/>
-                <a:cs typeface="Calibri" pitchFamily="34" charset="-120"/>
+                <a:latin typeface="Arial" pitchFamily="34" charset="0"/>
+                <a:ea typeface="Arial" pitchFamily="34" charset="-122"/>
+                <a:cs typeface="Arial" pitchFamily="34" charset="-120"/>
               </a:rPr>
               <a:t>Replay real mainnet blocks</a:t>
             </a:r>
@@ -5669,9 +4454,9 @@
                 <a:solidFill>
                   <a:srgbClr val="AEB6C8"/>
                 </a:solidFill>
-                <a:latin typeface="Calibri" pitchFamily="34" charset="0"/>
-                <a:ea typeface="Calibri" pitchFamily="34" charset="-122"/>
-                <a:cs typeface="Calibri" pitchFamily="34" charset="-120"/>
+                <a:latin typeface="Arial" pitchFamily="34" charset="0"/>
+                <a:ea typeface="Arial" pitchFamily="34" charset="-122"/>
+                <a:cs typeface="Arial" pitchFamily="34" charset="-120"/>
               </a:rPr>
               <a:t>Our workloads span the conflict and work axes by design; real traffic would show where chains actually sit on them.</a:t>
             </a:r>
@@ -5735,9 +4520,9 @@
                 <a:solidFill>
                   <a:srgbClr val="FFFFFF"/>
                 </a:solidFill>
-                <a:latin typeface="Calibri" pitchFamily="34" charset="0"/>
-                <a:ea typeface="Calibri" pitchFamily="34" charset="-122"/>
-                <a:cs typeface="Calibri" pitchFamily="34" charset="-120"/>
+                <a:latin typeface="Arial" pitchFamily="34" charset="0"/>
+                <a:ea typeface="Arial" pitchFamily="34" charset="-122"/>
+                <a:cs typeface="Arial" pitchFamily="34" charset="-120"/>
               </a:rPr>
               <a:t>A homogeneous machine</a:t>
             </a:r>
@@ -5777,9 +4562,9 @@
                 <a:solidFill>
                   <a:srgbClr val="AEB6C8"/>
                 </a:solidFill>
-                <a:latin typeface="Calibri" pitchFamily="34" charset="0"/>
-                <a:ea typeface="Calibri" pitchFamily="34" charset="-122"/>
-                <a:cs typeface="Calibri" pitchFamily="34" charset="-120"/>
+                <a:latin typeface="Arial" pitchFamily="34" charset="0"/>
+                <a:ea typeface="Arial" pitchFamily="34" charset="-122"/>
+                <a:cs typeface="Arial" pitchFamily="34" charset="-120"/>
               </a:rPr>
               <a:t>Results above six threads mix in efficiency cores; a server CPU would separate the scheduler from the chip.</a:t>
             </a:r>
@@ -5843,9 +4628,9 @@
                 <a:solidFill>
                   <a:srgbClr val="FFFFFF"/>
                 </a:solidFill>
-                <a:latin typeface="Calibri" pitchFamily="34" charset="0"/>
-                <a:ea typeface="Calibri" pitchFamily="34" charset="-122"/>
-                <a:cs typeface="Calibri" pitchFamily="34" charset="-120"/>
+                <a:latin typeface="Arial" pitchFamily="34" charset="0"/>
+                <a:ea typeface="Arial" pitchFamily="34" charset="-122"/>
+                <a:cs typeface="Arial" pitchFamily="34" charset="-120"/>
               </a:rPr>
               <a:t>Emit EIP-7928 lists</a:t>
             </a:r>
@@ -5885,9 +4670,9 @@
                 <a:solidFill>
                   <a:srgbClr val="AEB6C8"/>
                 </a:solidFill>
-                <a:latin typeface="Calibri" pitchFamily="34" charset="0"/>
-                <a:ea typeface="Calibri" pitchFamily="34" charset="-122"/>
-                <a:cs typeface="Calibri" pitchFamily="34" charset="-120"/>
+                <a:latin typeface="Arial" pitchFamily="34" charset="0"/>
+                <a:ea typeface="Arial" pitchFamily="34" charset="-122"/>
+                <a:cs typeface="Arial" pitchFamily="34" charset="-120"/>
               </a:rPr>
               <a:t>Produce canonical block access lists, and measure the builder's side as well as the validator's.</a:t>
             </a:r>
@@ -5924,9 +4709,9 @@
                 <a:solidFill>
                   <a:srgbClr val="FFFFFF"/>
                 </a:solidFill>
-                <a:latin typeface="Calibri" pitchFamily="34" charset="0"/>
-                <a:ea typeface="Calibri" pitchFamily="34" charset="-122"/>
-                <a:cs typeface="Calibri" pitchFamily="34" charset="-120"/>
+                <a:latin typeface="Arial" pitchFamily="34" charset="0"/>
+                <a:ea typeface="Arial" pitchFamily="34" charset="-122"/>
+                <a:cs typeface="Arial" pitchFamily="34" charset="-120"/>
               </a:rPr>
               <a:t>Code, data, figures and the full report: github.com/IcantFind-a-username/sc6109-parallel-evm</a:t>
             </a:r>
@@ -5963,9 +4748,9 @@
                 <a:solidFill>
                   <a:srgbClr val="EB6834"/>
                 </a:solidFill>
-                <a:latin typeface="Calibri" pitchFamily="34" charset="0"/>
-                <a:ea typeface="Calibri" pitchFamily="34" charset="-122"/>
-                <a:cs typeface="Calibri" pitchFamily="34" charset="-120"/>
+                <a:latin typeface="Arial" pitchFamily="34" charset="0"/>
+                <a:ea typeface="Arial" pitchFamily="34" charset="-122"/>
+                <a:cs typeface="Arial" pitchFamily="34" charset="-120"/>
               </a:rPr>
               <a:t>Thank you</a:t>
             </a:r>
@@ -6034,9 +4819,9 @@
                 <a:solidFill>
                   <a:srgbClr val="EB6834"/>
                 </a:solidFill>
-                <a:latin typeface="Calibri" pitchFamily="34" charset="0"/>
-                <a:ea typeface="Calibri" pitchFamily="34" charset="-122"/>
-                <a:cs typeface="Calibri" pitchFamily="34" charset="-120"/>
+                <a:latin typeface="Arial" pitchFamily="34" charset="0"/>
+                <a:ea typeface="Arial" pitchFamily="34" charset="-122"/>
+                <a:cs typeface="Arial" pitchFamily="34" charset="-120"/>
               </a:rPr>
               <a:t>THE QUESTION</a:t>
             </a:r>
@@ -6069,17 +4854,17 @@
               <a:buNone/>
             </a:pPr>
             <a:r>
-              <a:rPr lang="en-US" sz="3200" b="1" dirty="0">
+              <a:rPr lang="en-US" sz="2800" b="1" dirty="0">
                 <a:solidFill>
                   <a:srgbClr val="14181F"/>
                 </a:solidFill>
-                <a:latin typeface="Calibri" pitchFamily="34" charset="0"/>
-                <a:ea typeface="Calibri" pitchFamily="34" charset="-122"/>
-                <a:cs typeface="Calibri" pitchFamily="34" charset="-120"/>
+                <a:latin typeface="Arial" pitchFamily="34" charset="0"/>
+                <a:ea typeface="Arial" pitchFamily="34" charset="-122"/>
+                <a:cs typeface="Arial" pitchFamily="34" charset="-120"/>
               </a:rPr>
               <a:t>The dependency bound says 1,000×. We measured 1.4×.</a:t>
             </a:r>
-            <a:endParaRPr lang="en-US" sz="3200" dirty="0"/>
+            <a:endParaRPr lang="en-US" sz="2800" dirty="0"/>
           </a:p>
         </p:txBody>
       </p:sp>
@@ -6115,9 +4900,9 @@
                 <a:solidFill>
                   <a:srgbClr val="14181F"/>
                 </a:solidFill>
-                <a:latin typeface="Calibri" pitchFamily="34" charset="0"/>
-                <a:ea typeface="Calibri" pitchFamily="34" charset="-122"/>
-                <a:cs typeface="Calibri" pitchFamily="34" charset="-120"/>
+                <a:latin typeface="Arial" pitchFamily="34" charset="0"/>
+                <a:ea typeface="Arial" pitchFamily="34" charset="-122"/>
+                <a:cs typeface="Arial" pitchFamily="34" charset="-120"/>
               </a:rPr>
               <a:t>Take 2,000 ETH transfers between random accounts in a large population. Almost none of them touch the same account: the longest chain of dependencies is two transactions long, so in principle they could run a thousand ways in parallel.</a:t>
             </a:r>
@@ -6144,9 +4929,9 @@
                 <a:solidFill>
                   <a:srgbClr val="14181F"/>
                 </a:solidFill>
-                <a:latin typeface="Calibri" pitchFamily="34" charset="0"/>
-                <a:ea typeface="Calibri" pitchFamily="34" charset="-122"/>
-                <a:cs typeface="Calibri" pitchFamily="34" charset="-120"/>
+                <a:latin typeface="Arial" pitchFamily="34" charset="0"/>
+                <a:ea typeface="Arial" pitchFamily="34" charset="-122"/>
+                <a:cs typeface="Arial" pitchFamily="34" charset="-120"/>
               </a:rPr>
               <a:t>On six cores, Block-STM runs that block 1.4 times faster than sequential. It runs a block of ERC-20 transfers 2.8 times faster, compute-heavy calls 5.6 times faster — and an NFT mint at less than half speed.</a:t>
             </a:r>
@@ -6173,9 +4958,9 @@
                 <a:solidFill>
                   <a:srgbClr val="14181F"/>
                 </a:solidFill>
-                <a:latin typeface="Calibri" pitchFamily="34" charset="0"/>
-                <a:ea typeface="Calibri" pitchFamily="34" charset="-122"/>
-                <a:cs typeface="Calibri" pitchFamily="34" charset="-120"/>
+                <a:latin typeface="Arial" pitchFamily="34" charset="0"/>
+                <a:ea typeface="Arial" pitchFamily="34" charset="-122"/>
+                <a:cs typeface="Arial" pitchFamily="34" charset="-120"/>
               </a:rPr>
               <a:t>The gap between the bound and the measurement is the subject of this project.</a:t>
             </a:r>
@@ -6239,9 +5024,9 @@
                 <a:solidFill>
                   <a:srgbClr val="5A6272"/>
                 </a:solidFill>
-                <a:latin typeface="Calibri" pitchFamily="34" charset="0"/>
-                <a:ea typeface="Calibri" pitchFamily="34" charset="-122"/>
-                <a:cs typeface="Calibri" pitchFamily="34" charset="-120"/>
+                <a:latin typeface="Arial" pitchFamily="34" charset="0"/>
+                <a:ea typeface="Arial" pitchFamily="34" charset="-122"/>
+                <a:cs typeface="Arial" pitchFamily="34" charset="-120"/>
               </a:rPr>
               <a:t>1,000×</a:t>
             </a:r>
@@ -6278,9 +5063,9 @@
                 <a:solidFill>
                   <a:srgbClr val="14181F"/>
                 </a:solidFill>
-                <a:latin typeface="Calibri" pitchFamily="34" charset="0"/>
-                <a:ea typeface="Calibri" pitchFamily="34" charset="-122"/>
-                <a:cs typeface="Calibri" pitchFamily="34" charset="-120"/>
+                <a:latin typeface="Arial" pitchFamily="34" charset="0"/>
+                <a:ea typeface="Arial" pitchFamily="34" charset="-122"/>
+                <a:cs typeface="Arial" pitchFamily="34" charset="-120"/>
               </a:rPr>
               <a:t>dependency ceiling for independent transfers</a:t>
             </a:r>
@@ -6344,9 +5129,9 @@
                 <a:solidFill>
                   <a:srgbClr val="2A78D6"/>
                 </a:solidFill>
-                <a:latin typeface="Calibri" pitchFamily="34" charset="0"/>
-                <a:ea typeface="Calibri" pitchFamily="34" charset="-122"/>
-                <a:cs typeface="Calibri" pitchFamily="34" charset="-120"/>
+                <a:latin typeface="Arial" pitchFamily="34" charset="0"/>
+                <a:ea typeface="Arial" pitchFamily="34" charset="-122"/>
+                <a:cs typeface="Arial" pitchFamily="34" charset="-120"/>
               </a:rPr>
               <a:t>1.4×</a:t>
             </a:r>
@@ -6383,9 +5168,9 @@
                 <a:solidFill>
                   <a:srgbClr val="14181F"/>
                 </a:solidFill>
-                <a:latin typeface="Calibri" pitchFamily="34" charset="0"/>
-                <a:ea typeface="Calibri" pitchFamily="34" charset="-122"/>
-                <a:cs typeface="Calibri" pitchFamily="34" charset="-120"/>
+                <a:latin typeface="Arial" pitchFamily="34" charset="0"/>
+                <a:ea typeface="Arial" pitchFamily="34" charset="-122"/>
+                <a:cs typeface="Arial" pitchFamily="34" charset="-120"/>
               </a:rPr>
               <a:t>measured, ETH transfers</a:t>
             </a:r>
@@ -6449,9 +5234,9 @@
                 <a:solidFill>
                   <a:srgbClr val="1BAF7A"/>
                 </a:solidFill>
-                <a:latin typeface="Calibri" pitchFamily="34" charset="0"/>
-                <a:ea typeface="Calibri" pitchFamily="34" charset="-122"/>
-                <a:cs typeface="Calibri" pitchFamily="34" charset="-120"/>
+                <a:latin typeface="Arial" pitchFamily="34" charset="0"/>
+                <a:ea typeface="Arial" pitchFamily="34" charset="-122"/>
+                <a:cs typeface="Arial" pitchFamily="34" charset="-120"/>
               </a:rPr>
               <a:t>2.8×</a:t>
             </a:r>
@@ -6488,9 +5273,9 @@
                 <a:solidFill>
                   <a:srgbClr val="14181F"/>
                 </a:solidFill>
-                <a:latin typeface="Calibri" pitchFamily="34" charset="0"/>
-                <a:ea typeface="Calibri" pitchFamily="34" charset="-122"/>
-                <a:cs typeface="Calibri" pitchFamily="34" charset="-120"/>
+                <a:latin typeface="Arial" pitchFamily="34" charset="0"/>
+                <a:ea typeface="Arial" pitchFamily="34" charset="-122"/>
+                <a:cs typeface="Arial" pitchFamily="34" charset="-120"/>
               </a:rPr>
               <a:t>measured, ERC-20 transfers</a:t>
             </a:r>
@@ -6554,9 +5339,9 @@
                 <a:solidFill>
                   <a:srgbClr val="EB6834"/>
                 </a:solidFill>
-                <a:latin typeface="Calibri" pitchFamily="34" charset="0"/>
-                <a:ea typeface="Calibri" pitchFamily="34" charset="-122"/>
-                <a:cs typeface="Calibri" pitchFamily="34" charset="-120"/>
+                <a:latin typeface="Arial" pitchFamily="34" charset="0"/>
+                <a:ea typeface="Arial" pitchFamily="34" charset="-122"/>
+                <a:cs typeface="Arial" pitchFamily="34" charset="-120"/>
               </a:rPr>
               <a:t>0.43×</a:t>
             </a:r>
@@ -6593,9 +5378,9 @@
                 <a:solidFill>
                   <a:srgbClr val="14181F"/>
                 </a:solidFill>
-                <a:latin typeface="Calibri" pitchFamily="34" charset="0"/>
-                <a:ea typeface="Calibri" pitchFamily="34" charset="-122"/>
-                <a:cs typeface="Calibri" pitchFamily="34" charset="-120"/>
+                <a:latin typeface="Arial" pitchFamily="34" charset="0"/>
+                <a:ea typeface="Arial" pitchFamily="34" charset="-122"/>
+                <a:cs typeface="Arial" pitchFamily="34" charset="-120"/>
               </a:rPr>
               <a:t>measured, NFT mint</a:t>
             </a:r>
@@ -6632,9 +5417,9 @@
                 <a:solidFill>
                   <a:srgbClr val="5A6272"/>
                 </a:solidFill>
-                <a:latin typeface="Calibri" pitchFamily="34" charset="0"/>
-                <a:ea typeface="Calibri" pitchFamily="34" charset="-122"/>
-                <a:cs typeface="Calibri" pitchFamily="34" charset="-120"/>
+                <a:latin typeface="Arial" pitchFamily="34" charset="0"/>
+                <a:ea typeface="Arial" pitchFamily="34" charset="-122"/>
+                <a:cs typeface="Arial" pitchFamily="34" charset="-120"/>
               </a:rPr>
               <a:t>Block-STM at 6 threads on an Apple M3 Pro, 2,000-transaction blocks. Ceiling = block size ÷ critical path.</a:t>
             </a:r>
@@ -6703,9 +5488,9 @@
                 <a:solidFill>
                   <a:srgbClr val="EB6834"/>
                 </a:solidFill>
-                <a:latin typeface="Calibri" pitchFamily="34" charset="0"/>
-                <a:ea typeface="Calibri" pitchFamily="34" charset="-122"/>
-                <a:cs typeface="Calibri" pitchFamily="34" charset="-120"/>
+                <a:latin typeface="Arial" pitchFamily="34" charset="0"/>
+                <a:ea typeface="Arial" pitchFamily="34" charset="-122"/>
+                <a:cs typeface="Arial" pitchFamily="34" charset="-120"/>
               </a:rPr>
               <a:t>WHAT WE BUILT</a:t>
             </a:r>
@@ -6738,17 +5523,17 @@
               <a:buNone/>
             </a:pPr>
             <a:r>
-              <a:rPr lang="en-US" sz="3200" b="1" dirty="0">
+              <a:rPr lang="en-US" sz="2800" b="1" dirty="0">
                 <a:solidFill>
                   <a:srgbClr val="14181F"/>
                 </a:solidFill>
-                <a:latin typeface="Calibri" pitchFamily="34" charset="0"/>
-                <a:ea typeface="Calibri" pitchFamily="34" charset="-122"/>
-                <a:cs typeface="Calibri" pitchFamily="34" charset="-120"/>
+                <a:latin typeface="Arial" pitchFamily="34" charset="0"/>
+                <a:ea typeface="Arial" pitchFamily="34" charset="-122"/>
+                <a:cs typeface="Arial" pitchFamily="34" charset="-120"/>
               </a:rPr>
               <a:t>One execution path, three schedulers, every read recorded</a:t>
             </a:r>
-            <a:endParaRPr lang="en-US" sz="3200" dirty="0"/>
+            <a:endParaRPr lang="en-US" sz="2800" dirty="0"/>
           </a:p>
         </p:txBody>
       </p:sp>
@@ -6808,9 +5593,9 @@
                 <a:solidFill>
                   <a:srgbClr val="FFFFFF"/>
                 </a:solidFill>
-                <a:latin typeface="Calibri" pitchFamily="34" charset="0"/>
-                <a:ea typeface="Calibri" pitchFamily="34" charset="-122"/>
-                <a:cs typeface="Calibri" pitchFamily="34" charset="-120"/>
+                <a:latin typeface="Arial" pitchFamily="34" charset="0"/>
+                <a:ea typeface="Arial" pitchFamily="34" charset="-122"/>
+                <a:cs typeface="Arial" pitchFamily="34" charset="-120"/>
               </a:rPr>
               <a:t>revm 41</a:t>
             </a:r>
@@ -6847,9 +5632,9 @@
                 <a:solidFill>
                   <a:srgbClr val="14181F"/>
                 </a:solidFill>
-                <a:latin typeface="Calibri" pitchFamily="34" charset="0"/>
-                <a:ea typeface="Calibri" pitchFamily="34" charset="-122"/>
-                <a:cs typeface="Calibri" pitchFamily="34" charset="-120"/>
+                <a:latin typeface="Arial" pitchFamily="34" charset="0"/>
+                <a:ea typeface="Arial" pitchFamily="34" charset="-122"/>
+                <a:cs typeface="Arial" pitchFamily="34" charset="-120"/>
               </a:rPr>
               <a:t>real EVM, embedded as a library</a:t>
             </a:r>
@@ -6936,9 +5721,9 @@
                 <a:solidFill>
                   <a:srgbClr val="FFFFFF"/>
                 </a:solidFill>
-                <a:latin typeface="Calibri" pitchFamily="34" charset="0"/>
-                <a:ea typeface="Calibri" pitchFamily="34" charset="-122"/>
-                <a:cs typeface="Calibri" pitchFamily="34" charset="-120"/>
+                <a:latin typeface="Arial" pitchFamily="34" charset="0"/>
+                <a:ea typeface="Arial" pitchFamily="34" charset="-122"/>
+                <a:cs typeface="Arial" pitchFamily="34" charset="-120"/>
               </a:rPr>
               <a:t>ReadRecorder</a:t>
             </a:r>
@@ -6975,9 +5760,9 @@
                 <a:solidFill>
                   <a:srgbClr val="14181F"/>
                 </a:solidFill>
-                <a:latin typeface="Calibri" pitchFamily="34" charset="0"/>
-                <a:ea typeface="Calibri" pitchFamily="34" charset="-122"/>
-                <a:cs typeface="Calibri" pitchFamily="34" charset="-120"/>
+                <a:latin typeface="Arial" pitchFamily="34" charset="0"/>
+                <a:ea typeface="Arial" pitchFamily="34" charset="-122"/>
+                <a:cs typeface="Arial" pitchFamily="34" charset="-120"/>
               </a:rPr>
               <a:t>the only DatabaseRef in the crate — no read reaches the EVM unlogged</a:t>
             </a:r>
@@ -7064,9 +5849,9 @@
                 <a:solidFill>
                   <a:srgbClr val="FFFFFF"/>
                 </a:solidFill>
-                <a:latin typeface="Calibri" pitchFamily="34" charset="0"/>
-                <a:ea typeface="Calibri" pitchFamily="34" charset="-122"/>
-                <a:cs typeface="Calibri" pitchFamily="34" charset="-120"/>
+                <a:latin typeface="Arial" pitchFamily="34" charset="0"/>
+                <a:ea typeface="Arial" pitchFamily="34" charset="-122"/>
+                <a:cs typeface="Arial" pitchFamily="34" charset="-120"/>
               </a:rPr>
               <a:t>MVView  ·  SimpleView</a:t>
             </a:r>
@@ -7103,9 +5888,9 @@
                 <a:solidFill>
                   <a:srgbClr val="14181F"/>
                 </a:solidFill>
-                <a:latin typeface="Calibri" pitchFamily="34" charset="0"/>
-                <a:ea typeface="Calibri" pitchFamily="34" charset="-122"/>
-                <a:cs typeface="Calibri" pitchFamily="34" charset="-120"/>
+                <a:latin typeface="Arial" pitchFamily="34" charset="0"/>
+                <a:ea typeface="Arial" pitchFamily="34" charset="-122"/>
+                <a:cs typeface="Arial" pitchFamily="34" charset="-120"/>
               </a:rPr>
               <a:t>multi-version memory for the parallel engines · plain state for the baseline</a:t>
             </a:r>
@@ -7192,9 +5977,9 @@
                 <a:solidFill>
                   <a:srgbClr val="FFFFFF"/>
                 </a:solidFill>
-                <a:latin typeface="Calibri" pitchFamily="34" charset="0"/>
-                <a:ea typeface="Calibri" pitchFamily="34" charset="-122"/>
-                <a:cs typeface="Calibri" pitchFamily="34" charset="-120"/>
+                <a:latin typeface="Arial" pitchFamily="34" charset="0"/>
+                <a:ea typeface="Arial" pitchFamily="34" charset="-122"/>
+                <a:cs typeface="Arial" pitchFamily="34" charset="-120"/>
               </a:rPr>
               <a:t>BaseState</a:t>
             </a:r>
@@ -7231,9 +6016,9 @@
                 <a:solidFill>
                   <a:srgbClr val="14181F"/>
                 </a:solidFill>
-                <a:latin typeface="Calibri" pitchFamily="34" charset="0"/>
-                <a:ea typeface="Calibri" pitchFamily="34" charset="-122"/>
-                <a:cs typeface="Calibri" pitchFamily="34" charset="-120"/>
+                <a:latin typeface="Arial" pitchFamily="34" charset="0"/>
+                <a:ea typeface="Arial" pitchFamily="34" charset="-122"/>
+                <a:cs typeface="Arial" pitchFamily="34" charset="-120"/>
               </a:rPr>
               <a:t>pre-block snapshot: accounts, storage, compiled contract code</a:t>
             </a:r>
@@ -7300,9 +6085,9 @@
                 <a:solidFill>
                   <a:srgbClr val="14181F"/>
                 </a:solidFill>
-                <a:latin typeface="Calibri" pitchFamily="34" charset="0"/>
-                <a:ea typeface="Calibri" pitchFamily="34" charset="-122"/>
-                <a:cs typeface="Calibri" pitchFamily="34" charset="-120"/>
+                <a:latin typeface="Arial" pitchFamily="34" charset="0"/>
+                <a:ea typeface="Arial" pitchFamily="34" charset="-122"/>
+                <a:cs typeface="Arial" pitchFamily="34" charset="-120"/>
               </a:rPr>
               <a:t>Why it is shaped this way</a:t>
             </a:r>
@@ -7342,9 +6127,9 @@
                 <a:solidFill>
                   <a:srgbClr val="14181F"/>
                 </a:solidFill>
-                <a:latin typeface="Calibri" pitchFamily="34" charset="0"/>
-                <a:ea typeface="Calibri" pitchFamily="34" charset="-122"/>
-                <a:cs typeface="Calibri" pitchFamily="34" charset="-120"/>
+                <a:latin typeface="Arial" pitchFamily="34" charset="0"/>
+                <a:ea typeface="Arial" pitchFamily="34" charset="-122"/>
+                <a:cs typeface="Arial" pitchFamily="34" charset="-120"/>
               </a:rPr>
               <a:t>Block-STM is only correct if every read is re-checked. A read the recorder misses is a silent bug that appears on one seed in hundreds.</a:t>
             </a:r>
@@ -7371,9 +6156,9 @@
                 <a:solidFill>
                   <a:srgbClr val="14181F"/>
                 </a:solidFill>
-                <a:latin typeface="Calibri" pitchFamily="34" charset="0"/>
-                <a:ea typeface="Calibri" pitchFamily="34" charset="-122"/>
-                <a:cs typeface="Calibri" pitchFamily="34" charset="-120"/>
+                <a:latin typeface="Arial" pitchFamily="34" charset="0"/>
+                <a:ea typeface="Arial" pitchFamily="34" charset="-122"/>
+                <a:cs typeface="Arial" pitchFamily="34" charset="-120"/>
               </a:rPr>
               <a:t>So reads are captured in one place, by construction — and the sequential baseline goes through the same path, so it is never quietly cheaper than what it is compared against.</a:t>
             </a:r>
@@ -7410,9 +6195,9 @@
                 <a:solidFill>
                   <a:srgbClr val="5A6272"/>
                 </a:solidFill>
-                <a:latin typeface="Calibri" pitchFamily="34" charset="0"/>
-                <a:ea typeface="Calibri" pitchFamily="34" charset="-122"/>
-                <a:cs typeface="Calibri" pitchFamily="34" charset="-120"/>
+                <a:latin typeface="Arial" pitchFamily="34" charset="0"/>
+                <a:ea typeface="Arial" pitchFamily="34" charset="-122"/>
+                <a:cs typeface="Arial" pitchFamily="34" charset="-120"/>
               </a:rPr>
               <a:t>Rust · revm 41.0.0 · rayon · Solidity 0.8.28 via Foundry</a:t>
             </a:r>
@@ -7481,9 +6266,9 @@
                 <a:solidFill>
                   <a:srgbClr val="EB6834"/>
                 </a:solidFill>
-                <a:latin typeface="Calibri" pitchFamily="34" charset="0"/>
-                <a:ea typeface="Calibri" pitchFamily="34" charset="-122"/>
-                <a:cs typeface="Calibri" pitchFamily="34" charset="-120"/>
+                <a:latin typeface="Arial" pitchFamily="34" charset="0"/>
+                <a:ea typeface="Arial" pitchFamily="34" charset="-122"/>
+                <a:cs typeface="Arial" pitchFamily="34" charset="-120"/>
               </a:rPr>
               <a:t>THREE WAYS TO FIND PARALLELISM</a:t>
             </a:r>
@@ -7516,17 +6301,17 @@
               <a:buNone/>
             </a:pPr>
             <a:r>
-              <a:rPr lang="en-US" sz="3200" b="1" dirty="0">
+              <a:rPr lang="en-US" sz="2800" b="1" dirty="0">
                 <a:solidFill>
                   <a:srgbClr val="14181F"/>
                 </a:solidFill>
-                <a:latin typeface="Calibri" pitchFamily="34" charset="0"/>
-                <a:ea typeface="Calibri" pitchFamily="34" charset="-122"/>
-                <a:cs typeface="Calibri" pitchFamily="34" charset="-120"/>
+                <a:latin typeface="Arial" pitchFamily="34" charset="0"/>
+                <a:ea typeface="Arial" pitchFamily="34" charset="-122"/>
+                <a:cs typeface="Arial" pitchFamily="34" charset="-120"/>
               </a:rPr>
               <a:t>Speculate in rounds, collaborate, or declare up front</a:t>
             </a:r>
-            <a:endParaRPr lang="en-US" sz="3200" dirty="0"/>
+            <a:endParaRPr lang="en-US" sz="2800" dirty="0"/>
           </a:p>
         </p:txBody>
       </p:sp>
@@ -7613,9 +6398,9 @@
                 <a:solidFill>
                   <a:srgbClr val="FFFFFF"/>
                 </a:solidFill>
-                <a:latin typeface="Calibri" pitchFamily="34" charset="0"/>
-                <a:ea typeface="Calibri" pitchFamily="34" charset="-122"/>
-                <a:cs typeface="Calibri" pitchFamily="34" charset="-120"/>
+                <a:latin typeface="Arial" pitchFamily="34" charset="0"/>
+                <a:ea typeface="Arial" pitchFamily="34" charset="-122"/>
+                <a:cs typeface="Arial" pitchFamily="34" charset="-120"/>
               </a:rPr>
               <a:t>1</a:t>
             </a:r>
@@ -7652,9 +6437,9 @@
                 <a:solidFill>
                   <a:srgbClr val="5A6272"/>
                 </a:solidFill>
-                <a:latin typeface="Calibri" pitchFamily="34" charset="0"/>
-                <a:ea typeface="Calibri" pitchFamily="34" charset="-122"/>
-                <a:cs typeface="Calibri" pitchFamily="34" charset="-120"/>
+                <a:latin typeface="Arial" pitchFamily="34" charset="0"/>
+                <a:ea typeface="Arial" pitchFamily="34" charset="-122"/>
+                <a:cs typeface="Arial" pitchFamily="34" charset="-120"/>
               </a:rPr>
               <a:t>M2a</a:t>
             </a:r>
@@ -7691,9 +6476,9 @@
                 <a:solidFill>
                   <a:srgbClr val="14181F"/>
                 </a:solidFill>
-                <a:latin typeface="Calibri" pitchFamily="34" charset="0"/>
-                <a:ea typeface="Calibri" pitchFamily="34" charset="-122"/>
-                <a:cs typeface="Calibri" pitchFamily="34" charset="-120"/>
+                <a:latin typeface="Arial" pitchFamily="34" charset="0"/>
+                <a:ea typeface="Arial" pitchFamily="34" charset="-122"/>
+                <a:cs typeface="Arial" pitchFamily="34" charset="-120"/>
               </a:rPr>
               <a:t>Round-based optimistic</a:t>
             </a:r>
@@ -7733,9 +6518,9 @@
                 <a:solidFill>
                   <a:srgbClr val="14181F"/>
                 </a:solidFill>
-                <a:latin typeface="Calibri" pitchFamily="34" charset="0"/>
-                <a:ea typeface="Calibri" pitchFamily="34" charset="-122"/>
-                <a:cs typeface="Calibri" pitchFamily="34" charset="-120"/>
+                <a:latin typeface="Arial" pitchFamily="34" charset="0"/>
+                <a:ea typeface="Arial" pitchFamily="34" charset="-122"/>
+                <a:cs typeface="Arial" pitchFamily="34" charset="-120"/>
               </a:rPr>
               <a:t>Run every pending transaction at once, validate all, re-run the failures, repeat.</a:t>
             </a:r>
@@ -7775,9 +6560,9 @@
                 <a:solidFill>
                   <a:srgbClr val="14181F"/>
                 </a:solidFill>
-                <a:latin typeface="Calibri" pitchFamily="34" charset="0"/>
-                <a:ea typeface="Calibri" pitchFamily="34" charset="-122"/>
-                <a:cs typeface="Calibri" pitchFamily="34" charset="-120"/>
+                <a:latin typeface="Arial" pitchFamily="34" charset="0"/>
+                <a:ea typeface="Arial" pitchFamily="34" charset="-122"/>
+                <a:cs typeface="Arial" pitchFamily="34" charset="-120"/>
               </a:rPr>
               <a:t>+ Simple; provably ends within n rounds.</a:t>
             </a:r>
@@ -7817,9 +6602,9 @@
                 <a:solidFill>
                   <a:srgbClr val="5A6272"/>
                 </a:solidFill>
-                <a:latin typeface="Calibri" pitchFamily="34" charset="0"/>
-                <a:ea typeface="Calibri" pitchFamily="34" charset="-122"/>
-                <a:cs typeface="Calibri" pitchFamily="34" charset="-120"/>
+                <a:latin typeface="Arial" pitchFamily="34" charset="0"/>
+                <a:ea typeface="Arial" pitchFamily="34" charset="-122"/>
+                <a:cs typeface="Arial" pitchFamily="34" charset="-120"/>
               </a:rPr>
               <a:t>− On a dependency chain, re-runs everything above each fix: quadratic.</a:t>
             </a:r>
@@ -7910,9 +6695,9 @@
                 <a:solidFill>
                   <a:srgbClr val="FFFFFF"/>
                 </a:solidFill>
-                <a:latin typeface="Calibri" pitchFamily="34" charset="0"/>
-                <a:ea typeface="Calibri" pitchFamily="34" charset="-122"/>
-                <a:cs typeface="Calibri" pitchFamily="34" charset="-120"/>
+                <a:latin typeface="Arial" pitchFamily="34" charset="0"/>
+                <a:ea typeface="Arial" pitchFamily="34" charset="-122"/>
+                <a:cs typeface="Arial" pitchFamily="34" charset="-120"/>
               </a:rPr>
               <a:t>2</a:t>
             </a:r>
@@ -7949,9 +6734,9 @@
                 <a:solidFill>
                   <a:srgbClr val="5A6272"/>
                 </a:solidFill>
-                <a:latin typeface="Calibri" pitchFamily="34" charset="0"/>
-                <a:ea typeface="Calibri" pitchFamily="34" charset="-122"/>
-                <a:cs typeface="Calibri" pitchFamily="34" charset="-120"/>
+                <a:latin typeface="Arial" pitchFamily="34" charset="0"/>
+                <a:ea typeface="Arial" pitchFamily="34" charset="-122"/>
+                <a:cs typeface="Arial" pitchFamily="34" charset="-120"/>
               </a:rPr>
               <a:t>M2b</a:t>
             </a:r>
@@ -7988,9 +6773,9 @@
                 <a:solidFill>
                   <a:srgbClr val="14181F"/>
                 </a:solidFill>
-                <a:latin typeface="Calibri" pitchFamily="34" charset="0"/>
-                <a:ea typeface="Calibri" pitchFamily="34" charset="-122"/>
-                <a:cs typeface="Calibri" pitchFamily="34" charset="-120"/>
+                <a:latin typeface="Arial" pitchFamily="34" charset="0"/>
+                <a:ea typeface="Arial" pitchFamily="34" charset="-122"/>
+                <a:cs typeface="Arial" pitchFamily="34" charset="-120"/>
               </a:rPr>
               <a:t>Block-STM</a:t>
             </a:r>
@@ -8030,9 +6815,9 @@
                 <a:solidFill>
                   <a:srgbClr val="14181F"/>
                 </a:solidFill>
-                <a:latin typeface="Calibri" pitchFamily="34" charset="0"/>
-                <a:ea typeface="Calibri" pitchFamily="34" charset="-122"/>
-                <a:cs typeface="Calibri" pitchFamily="34" charset="-120"/>
+                <a:latin typeface="Arial" pitchFamily="34" charset="0"/>
+                <a:ea typeface="Arial" pitchFamily="34" charset="-122"/>
+                <a:cs typeface="Arial" pitchFamily="34" charset="-120"/>
               </a:rPr>
               <a:t>Workers share execution and validation tasks; a read of an aborted write parks the reader until the writer finishes.</a:t>
             </a:r>
@@ -8072,9 +6857,9 @@
                 <a:solidFill>
                   <a:srgbClr val="14181F"/>
                 </a:solidFill>
-                <a:latin typeface="Calibri" pitchFamily="34" charset="0"/>
-                <a:ea typeface="Calibri" pitchFamily="34" charset="-122"/>
-                <a:cs typeface="Calibri" pitchFamily="34" charset="-120"/>
+                <a:latin typeface="Arial" pitchFamily="34" charset="0"/>
+                <a:ea typeface="Arial" pitchFamily="34" charset="-122"/>
+                <a:cs typeface="Arial" pitchFamily="34" charset="-120"/>
               </a:rPr>
               <a:t>+ Degrades gracefully under contention.</a:t>
             </a:r>
@@ -8114,9 +6899,9 @@
                 <a:solidFill>
                   <a:srgbClr val="5A6272"/>
                 </a:solidFill>
-                <a:latin typeface="Calibri" pitchFamily="34" charset="0"/>
-                <a:ea typeface="Calibri" pitchFamily="34" charset="-122"/>
-                <a:cs typeface="Calibri" pitchFamily="34" charset="-120"/>
+                <a:latin typeface="Arial" pitchFamily="34" charset="0"/>
+                <a:ea typeface="Arial" pitchFamily="34" charset="-122"/>
+                <a:cs typeface="Arial" pitchFamily="34" charset="-120"/>
               </a:rPr>
               <a:t>− Pays for versioning and validation even when nothing conflicts.</a:t>
             </a:r>
@@ -8207,9 +6992,9 @@
                 <a:solidFill>
                   <a:srgbClr val="FFFFFF"/>
                 </a:solidFill>
-                <a:latin typeface="Calibri" pitchFamily="34" charset="0"/>
-                <a:ea typeface="Calibri" pitchFamily="34" charset="-122"/>
-                <a:cs typeface="Calibri" pitchFamily="34" charset="-120"/>
+                <a:latin typeface="Arial" pitchFamily="34" charset="0"/>
+                <a:ea typeface="Arial" pitchFamily="34" charset="-122"/>
+                <a:cs typeface="Arial" pitchFamily="34" charset="-120"/>
               </a:rPr>
               <a:t>3</a:t>
             </a:r>
@@ -8246,9 +7031,9 @@
                 <a:solidFill>
                   <a:srgbClr val="5A6272"/>
                 </a:solidFill>
-                <a:latin typeface="Calibri" pitchFamily="34" charset="0"/>
-                <a:ea typeface="Calibri" pitchFamily="34" charset="-122"/>
-                <a:cs typeface="Calibri" pitchFamily="34" charset="-120"/>
+                <a:latin typeface="Arial" pitchFamily="34" charset="0"/>
+                <a:ea typeface="Arial" pitchFamily="34" charset="-122"/>
+                <a:cs typeface="Arial" pitchFamily="34" charset="-120"/>
               </a:rPr>
               <a:t>M3</a:t>
             </a:r>
@@ -8285,9 +7070,9 @@
                 <a:solidFill>
                   <a:srgbClr val="14181F"/>
                 </a:solidFill>
-                <a:latin typeface="Calibri" pitchFamily="34" charset="0"/>
-                <a:ea typeface="Calibri" pitchFamily="34" charset="-122"/>
-                <a:cs typeface="Calibri" pitchFamily="34" charset="-120"/>
+                <a:latin typeface="Arial" pitchFamily="34" charset="0"/>
+                <a:ea typeface="Arial" pitchFamily="34" charset="-122"/>
+                <a:cs typeface="Arial" pitchFamily="34" charset="-120"/>
               </a:rPr>
               <a:t>Static, EIP-7928 style</a:t>
             </a:r>
@@ -8327,9 +7112,9 @@
                 <a:solidFill>
                   <a:srgbClr val="14181F"/>
                 </a:solidFill>
-                <a:latin typeface="Calibri" pitchFamily="34" charset="0"/>
-                <a:ea typeface="Calibri" pitchFamily="34" charset="-122"/>
-                <a:cs typeface="Calibri" pitchFamily="34" charset="-120"/>
+                <a:latin typeface="Arial" pitchFamily="34" charset="0"/>
+                <a:ea typeface="Arial" pitchFamily="34" charset="-122"/>
+                <a:cs typeface="Arial" pitchFamily="34" charset="-120"/>
               </a:rPr>
               <a:t>Derive every transaction's access set as a block builder would, then run conflict-free levels in parallel.</a:t>
             </a:r>
@@ -8369,9 +7154,9 @@
                 <a:solidFill>
                   <a:srgbClr val="14181F"/>
                 </a:solidFill>
-                <a:latin typeface="Calibri" pitchFamily="34" charset="0"/>
-                <a:ea typeface="Calibri" pitchFamily="34" charset="-122"/>
-                <a:cs typeface="Calibri" pitchFamily="34" charset="-120"/>
+                <a:latin typeface="Arial" pitchFamily="34" charset="0"/>
+                <a:ea typeface="Arial" pitchFamily="34" charset="-122"/>
+                <a:cs typeface="Arial" pitchFamily="34" charset="-120"/>
               </a:rPr>
               <a:t>+ No speculation, no aborts; fastest when conflicts are rare.</a:t>
             </a:r>
@@ -8411,9 +7196,9 @@
                 <a:solidFill>
                   <a:srgbClr val="5A6272"/>
                 </a:solidFill>
-                <a:latin typeface="Calibri" pitchFamily="34" charset="0"/>
-                <a:ea typeface="Calibri" pitchFamily="34" charset="-122"/>
-                <a:cs typeface="Calibri" pitchFamily="34" charset="-120"/>
+                <a:latin typeface="Arial" pitchFamily="34" charset="0"/>
+                <a:ea typeface="Arial" pitchFamily="34" charset="-122"/>
+                <a:cs typeface="Arial" pitchFamily="34" charset="-120"/>
               </a:rPr>
               <a:t>− One barrier per level of the chain; needs the access list first.</a:t>
             </a:r>
@@ -8482,9 +7267,9 @@
                 <a:solidFill>
                   <a:srgbClr val="EB6834"/>
                 </a:solidFill>
-                <a:latin typeface="Calibri" pitchFamily="34" charset="0"/>
-                <a:ea typeface="Calibri" pitchFamily="34" charset="-122"/>
-                <a:cs typeface="Calibri" pitchFamily="34" charset="-120"/>
+                <a:latin typeface="Arial" pitchFamily="34" charset="0"/>
+                <a:ea typeface="Arial" pitchFamily="34" charset="-122"/>
+                <a:cs typeface="Arial" pitchFamily="34" charset="-120"/>
               </a:rPr>
               <a:t>DECIDING WHAT CONFLICTS</a:t>
             </a:r>
@@ -8517,17 +7302,17 @@
               <a:buNone/>
             </a:pPr>
             <a:r>
-              <a:rPr lang="en-US" sz="3200" b="1" dirty="0">
+              <a:rPr lang="en-US" sz="2800" b="1" dirty="0">
                 <a:solidFill>
                   <a:srgbClr val="14181F"/>
                 </a:solidFill>
-                <a:latin typeface="Calibri" pitchFamily="34" charset="0"/>
-                <a:ea typeface="Calibri" pitchFamily="34" charset="-122"/>
-                <a:cs typeface="Calibri" pitchFamily="34" charset="-120"/>
+                <a:latin typeface="Arial" pitchFamily="34" charset="0"/>
+                <a:ea typeface="Arial" pitchFamily="34" charset="-122"/>
+                <a:cs typeface="Arial" pitchFamily="34" charset="-120"/>
               </a:rPr>
               <a:t>A conflict is a changed value — not a touched account</a:t>
             </a:r>
-            <a:endParaRPr lang="en-US" sz="3200" dirty="0"/>
+            <a:endParaRPr lang="en-US" sz="2800" dirty="0"/>
           </a:p>
         </p:txBody>
       </p:sp>
@@ -8587,9 +7372,9 @@
                 <a:solidFill>
                   <a:srgbClr val="FFFFFF"/>
                 </a:solidFill>
-                <a:latin typeface="Calibri" pitchFamily="34" charset="0"/>
-                <a:ea typeface="Calibri" pitchFamily="34" charset="-122"/>
-                <a:cs typeface="Calibri" pitchFamily="34" charset="-120"/>
+                <a:latin typeface="Arial" pitchFamily="34" charset="0"/>
+                <a:ea typeface="Arial" pitchFamily="34" charset="-122"/>
+                <a:cs typeface="Arial" pitchFamily="34" charset="-120"/>
               </a:rPr>
               <a:t>1</a:t>
             </a:r>
@@ -8626,9 +7411,9 @@
                 <a:solidFill>
                   <a:srgbClr val="14181F"/>
                 </a:solidFill>
-                <a:latin typeface="Calibri" pitchFamily="34" charset="0"/>
-                <a:ea typeface="Calibri" pitchFamily="34" charset="-122"/>
-                <a:cs typeface="Calibri" pitchFamily="34" charset="-120"/>
+                <a:latin typeface="Arial" pitchFamily="34" charset="0"/>
+                <a:ea typeface="Arial" pitchFamily="34" charset="-122"/>
+                <a:cs typeface="Arial" pitchFamily="34" charset="-120"/>
               </a:rPr>
               <a:t>Read set: every location the EVM loaded</a:t>
             </a:r>
@@ -8668,9 +7453,9 @@
                 <a:solidFill>
                   <a:srgbClr val="5A6272"/>
                 </a:solidFill>
-                <a:latin typeface="Calibri" pitchFamily="34" charset="0"/>
-                <a:ea typeface="Calibri" pitchFamily="34" charset="-122"/>
-                <a:cs typeface="Calibri" pitchFamily="34" charset="-120"/>
+                <a:latin typeface="Arial" pitchFamily="34" charset="0"/>
+                <a:ea typeface="Arial" pitchFamily="34" charset="-122"/>
+                <a:cs typeface="Arial" pitchFamily="34" charset="-120"/>
               </a:rPr>
               <a:t>Balances, nonces, code hashes, storage slots — captured at the database boundary, each with the version it resolved to. Validation compares versions, not values.</a:t>
             </a:r>
@@ -8734,9 +7519,9 @@
                 <a:solidFill>
                   <a:srgbClr val="FFFFFF"/>
                 </a:solidFill>
-                <a:latin typeface="Calibri" pitchFamily="34" charset="0"/>
-                <a:ea typeface="Calibri" pitchFamily="34" charset="-122"/>
-                <a:cs typeface="Calibri" pitchFamily="34" charset="-120"/>
+                <a:latin typeface="Arial" pitchFamily="34" charset="0"/>
+                <a:ea typeface="Arial" pitchFamily="34" charset="-122"/>
+                <a:cs typeface="Arial" pitchFamily="34" charset="-120"/>
               </a:rPr>
               <a:t>2</a:t>
             </a:r>
@@ -8773,9 +7558,9 @@
                 <a:solidFill>
                   <a:srgbClr val="14181F"/>
                 </a:solidFill>
-                <a:latin typeface="Calibri" pitchFamily="34" charset="0"/>
-                <a:ea typeface="Calibri" pitchFamily="34" charset="-122"/>
-                <a:cs typeface="Calibri" pitchFamily="34" charset="-120"/>
+                <a:latin typeface="Arial" pitchFamily="34" charset="0"/>
+                <a:ea typeface="Arial" pitchFamily="34" charset="-122"/>
+                <a:cs typeface="Arial" pitchFamily="34" charset="-120"/>
               </a:rPr>
               <a:t>Write set: only what actually changed</a:t>
             </a:r>
@@ -8815,9 +7600,9 @@
                 <a:solidFill>
                   <a:srgbClr val="5A6272"/>
                 </a:solidFill>
-                <a:latin typeface="Calibri" pitchFamily="34" charset="0"/>
-                <a:ea typeface="Calibri" pitchFamily="34" charset="-122"/>
-                <a:cs typeface="Calibri" pitchFamily="34" charset="-120"/>
+                <a:latin typeface="Arial" pitchFamily="34" charset="0"/>
+                <a:ea typeface="Arial" pitchFamily="34" charset="-122"/>
+                <a:cs typeface="Arial" pitchFamily="34" charset="-120"/>
               </a:rPr>
               <a:t>Calling a contract touches its account without changing it. Counting touched as written made every call to one contract conflict with every other — a bug our benchmarks exposed.</a:t>
             </a:r>
@@ -8881,9 +7666,9 @@
                 <a:solidFill>
                   <a:srgbClr val="FFFFFF"/>
                 </a:solidFill>
-                <a:latin typeface="Calibri" pitchFamily="34" charset="0"/>
-                <a:ea typeface="Calibri" pitchFamily="34" charset="-122"/>
-                <a:cs typeface="Calibri" pitchFamily="34" charset="-120"/>
+                <a:latin typeface="Arial" pitchFamily="34" charset="0"/>
+                <a:ea typeface="Arial" pitchFamily="34" charset="-122"/>
+                <a:cs typeface="Arial" pitchFamily="34" charset="-120"/>
               </a:rPr>
               <a:t>3</a:t>
             </a:r>
@@ -8920,9 +7705,9 @@
                 <a:solidFill>
                   <a:srgbClr val="14181F"/>
                 </a:solidFill>
-                <a:latin typeface="Calibri" pitchFamily="34" charset="0"/>
-                <a:ea typeface="Calibri" pitchFamily="34" charset="-122"/>
-                <a:cs typeface="Calibri" pitchFamily="34" charset="-120"/>
+                <a:latin typeface="Arial" pitchFamily="34" charset="0"/>
+                <a:ea typeface="Arial" pitchFamily="34" charset="-122"/>
+                <a:cs typeface="Arial" pitchFamily="34" charset="-120"/>
               </a:rPr>
               <a:t>The fee recipient is an accumulator</a:t>
             </a:r>
@@ -8962,9 +7747,9 @@
                 <a:solidFill>
                   <a:srgbClr val="5A6272"/>
                 </a:solidFill>
-                <a:latin typeface="Calibri" pitchFamily="34" charset="0"/>
-                <a:ea typeface="Calibri" pitchFamily="34" charset="-122"/>
-                <a:cs typeface="Calibri" pitchFamily="34" charset="-120"/>
+                <a:latin typeface="Arial" pitchFamily="34" charset="0"/>
+                <a:ea typeface="Arial" pitchFamily="34" charset="-122"/>
+                <a:cs typeface="Arial" pitchFamily="34" charset="-120"/>
               </a:rPr>
               <a:t>Every transaction pays the block beneficiary. Fees add up in any order, so they are kept out of conflict detection and summed at commit.</a:t>
             </a:r>
@@ -9031,9 +7816,9 @@
                 <a:solidFill>
                   <a:srgbClr val="14181F"/>
                 </a:solidFill>
-                <a:latin typeface="Calibri" pitchFamily="34" charset="0"/>
-                <a:ea typeface="Calibri" pitchFamily="34" charset="-122"/>
-                <a:cs typeface="Calibri" pitchFamily="34" charset="-120"/>
+                <a:latin typeface="Arial" pitchFamily="34" charset="0"/>
+                <a:ea typeface="Arial" pitchFamily="34" charset="-122"/>
+                <a:cs typeface="Arial" pitchFamily="34" charset="-120"/>
               </a:rPr>
               <a:t>Granularity is a choice</a:t>
             </a:r>
@@ -9073,9 +7858,9 @@
                 <a:solidFill>
                   <a:srgbClr val="14181F"/>
                 </a:solidFill>
-                <a:latin typeface="Calibri" pitchFamily="34" charset="0"/>
-                <a:ea typeface="Calibri" pitchFamily="34" charset="-122"/>
-                <a:cs typeface="Calibri" pitchFamily="34" charset="-120"/>
+                <a:latin typeface="Arial" pitchFamily="34" charset="0"/>
+                <a:ea typeface="Arial" pitchFamily="34" charset="-122"/>
+                <a:cs typeface="Arial" pitchFamily="34" charset="-120"/>
               </a:rPr>
               <a:t>Per storage slot: two ERC-20 transfers between different holders are independent.</a:t>
             </a:r>
@@ -9102,9 +7887,9 @@
                 <a:solidFill>
                   <a:srgbClr val="14181F"/>
                 </a:solidFill>
-                <a:latin typeface="Calibri" pitchFamily="34" charset="0"/>
-                <a:ea typeface="Calibri" pitchFamily="34" charset="-122"/>
-                <a:cs typeface="Calibri" pitchFamily="34" charset="-120"/>
+                <a:latin typeface="Arial" pitchFamily="34" charset="0"/>
+                <a:ea typeface="Arial" pitchFamily="34" charset="-122"/>
+                <a:cs typeface="Arial" pitchFamily="34" charset="-120"/>
               </a:rPr>
               <a:t>Per account: every ERC-20 balance lives in the token contract's account — so every transfer conflicts with every other.</a:t>
             </a:r>
@@ -9131,9 +7916,9 @@
                 <a:solidFill>
                   <a:srgbClr val="14181F"/>
                 </a:solidFill>
-                <a:latin typeface="Calibri" pitchFamily="34" charset="0"/>
-                <a:ea typeface="Calibri" pitchFamily="34" charset="-122"/>
-                <a:cs typeface="Calibri" pitchFamily="34" charset="-120"/>
+                <a:latin typeface="Arial" pitchFamily="34" charset="0"/>
+                <a:ea typeface="Arial" pitchFamily="34" charset="-122"/>
+                <a:cs typeface="Arial" pitchFamily="34" charset="-120"/>
               </a:rPr>
               <a:t>We implemented both and measured the difference (slide 11).</a:t>
             </a:r>
@@ -9202,9 +7987,9 @@
                 <a:solidFill>
                   <a:srgbClr val="EB6834"/>
                 </a:solidFill>
-                <a:latin typeface="Calibri" pitchFamily="34" charset="0"/>
-                <a:ea typeface="Calibri" pitchFamily="34" charset="-122"/>
-                <a:cs typeface="Calibri" pitchFamily="34" charset="-120"/>
+                <a:latin typeface="Arial" pitchFamily="34" charset="0"/>
+                <a:ea typeface="Arial" pitchFamily="34" charset="-122"/>
+                <a:cs typeface="Arial" pitchFamily="34" charset="-120"/>
               </a:rPr>
               <a:t>CORRECTNESS FIRST</a:t>
             </a:r>
@@ -9237,17 +8022,17 @@
               <a:buNone/>
             </a:pPr>
             <a:r>
-              <a:rPr lang="en-US" sz="3200" b="1" dirty="0">
+              <a:rPr lang="en-US" sz="2800" b="1" dirty="0">
                 <a:solidFill>
                   <a:srgbClr val="FFFFFF"/>
                 </a:solidFill>
-                <a:latin typeface="Calibri" pitchFamily="34" charset="0"/>
-                <a:ea typeface="Calibri" pitchFamily="34" charset="-122"/>
-                <a:cs typeface="Calibri" pitchFamily="34" charset="-120"/>
+                <a:latin typeface="Arial" pitchFamily="34" charset="0"/>
+                <a:ea typeface="Arial" pitchFamily="34" charset="-122"/>
+                <a:cs typeface="Arial" pitchFamily="34" charset="-120"/>
               </a:rPr>
               <a:t>Every parallel result is bit-identical to sequential — and checked</a:t>
             </a:r>
-            <a:endParaRPr lang="en-US" sz="3200" dirty="0"/>
+            <a:endParaRPr lang="en-US" sz="2800" dirty="0"/>
           </a:p>
         </p:txBody>
       </p:sp>
@@ -9280,9 +8065,9 @@
                 <a:solidFill>
                   <a:srgbClr val="EB6834"/>
                 </a:solidFill>
-                <a:latin typeface="Calibri" pitchFamily="34" charset="0"/>
-                <a:ea typeface="Calibri" pitchFamily="34" charset="-122"/>
-                <a:cs typeface="Calibri" pitchFamily="34" charset="-120"/>
+                <a:latin typeface="Arial" pitchFamily="34" charset="0"/>
+                <a:ea typeface="Arial" pitchFamily="34" charset="-122"/>
+                <a:cs typeface="Arial" pitchFamily="34" charset="-120"/>
               </a:rPr>
               <a:t>1,000</a:t>
             </a:r>
@@ -9319,9 +8104,9 @@
                 <a:solidFill>
                   <a:srgbClr val="AEB6C8"/>
                 </a:solidFill>
-                <a:latin typeface="Calibri" pitchFamily="34" charset="0"/>
-                <a:ea typeface="Calibri" pitchFamily="34" charset="-122"/>
-                <a:cs typeface="Calibri" pitchFamily="34" charset="-120"/>
+                <a:latin typeface="Arial" pitchFamily="34" charset="0"/>
+                <a:ea typeface="Arial" pitchFamily="34" charset="-122"/>
+                <a:cs typeface="Arial" pitchFamily="34" charset="-120"/>
               </a:rPr>
               <a:t>seeds per workload, every scheduler, 2–12 threads — slot-for-slot against an independent sequential engine</a:t>
             </a:r>
@@ -9358,9 +8143,9 @@
                 <a:solidFill>
                   <a:srgbClr val="1BAF7A"/>
                 </a:solidFill>
-                <a:latin typeface="Calibri" pitchFamily="34" charset="0"/>
-                <a:ea typeface="Calibri" pitchFamily="34" charset="-122"/>
-                <a:cs typeface="Calibri" pitchFamily="34" charset="-120"/>
+                <a:latin typeface="Arial" pitchFamily="34" charset="0"/>
+                <a:ea typeface="Arial" pitchFamily="34" charset="-122"/>
+                <a:cs typeface="Arial" pitchFamily="34" charset="-120"/>
               </a:rPr>
               <a:t>9 / 9</a:t>
             </a:r>
@@ -9397,9 +8182,9 @@
                 <a:solidFill>
                   <a:srgbClr val="AEB6C8"/>
                 </a:solidFill>
-                <a:latin typeface="Calibri" pitchFamily="34" charset="0"/>
-                <a:ea typeface="Calibri" pitchFamily="34" charset="-122"/>
-                <a:cs typeface="Calibri" pitchFamily="34" charset="-120"/>
+                <a:latin typeface="Arial" pitchFamily="34" charset="0"/>
+                <a:ea typeface="Arial" pitchFamily="34" charset="-122"/>
+                <a:cs typeface="Arial" pitchFamily="34" charset="-120"/>
               </a:rPr>
               <a:t>workloads where our sequential engine matches an Anvil node: balances, nonces, code, storage, reverts</a:t>
             </a:r>
@@ -9436,9 +8221,9 @@
                 <a:solidFill>
                   <a:srgbClr val="FFFFFF"/>
                 </a:solidFill>
-                <a:latin typeface="Calibri" pitchFamily="34" charset="0"/>
-                <a:ea typeface="Calibri" pitchFamily="34" charset="-122"/>
-                <a:cs typeface="Calibri" pitchFamily="34" charset="-120"/>
+                <a:latin typeface="Arial" pitchFamily="34" charset="0"/>
+                <a:ea typeface="Arial" pitchFamily="34" charset="-122"/>
+                <a:cs typeface="Arial" pitchFamily="34" charset="-120"/>
               </a:rPr>
               <a:t>15</a:t>
             </a:r>
@@ -9475,9 +8260,9 @@
                 <a:solidFill>
                   <a:srgbClr val="AEB6C8"/>
                 </a:solidFill>
-                <a:latin typeface="Calibri" pitchFamily="34" charset="0"/>
-                <a:ea typeface="Calibri" pitchFamily="34" charset="-122"/>
-                <a:cs typeface="Calibri" pitchFamily="34" charset="-120"/>
+                <a:latin typeface="Arial" pitchFamily="34" charset="0"/>
+                <a:ea typeface="Arial" pitchFamily="34" charset="-122"/>
+                <a:cs typeface="Arial" pitchFamily="34" charset="-120"/>
               </a:rPr>
               <a:t>bugs injected on purpose to test the tests — all caught, after two gaps in the tests were found and closed</a:t>
             </a:r>
@@ -9544,9 +8329,9 @@
                 <a:solidFill>
                   <a:srgbClr val="FFFFFF"/>
                 </a:solidFill>
-                <a:latin typeface="Calibri" pitchFamily="34" charset="0"/>
-                <a:ea typeface="Calibri" pitchFamily="34" charset="-122"/>
-                <a:cs typeface="Calibri" pitchFamily="34" charset="-120"/>
+                <a:latin typeface="Arial" pitchFamily="34" charset="0"/>
+                <a:ea typeface="Arial" pitchFamily="34" charset="-122"/>
+                <a:cs typeface="Arial" pitchFamily="34" charset="-120"/>
               </a:rPr>
               <a:t>Real bugs the tests found</a:t>
             </a:r>
@@ -9586,9 +8371,9 @@
                 <a:solidFill>
                   <a:srgbClr val="AEB6C8"/>
                 </a:solidFill>
-                <a:latin typeface="Calibri" pitchFamily="34" charset="0"/>
-                <a:ea typeface="Calibri" pitchFamily="34" charset="-122"/>
-                <a:cs typeface="Calibri" pitchFamily="34" charset="-120"/>
+                <a:latin typeface="Arial" pitchFamily="34" charset="0"/>
+                <a:ea typeface="Arial" pitchFamily="34" charset="-122"/>
+                <a:cs typeface="Arial" pitchFamily="34" charset="-120"/>
               </a:rPr>
               <a:t>Generated accounts landed on precompile addresses — 15% of a block silently called ecrecover instead of transferring.</a:t>
             </a:r>
@@ -9606,9 +8391,9 @@
                 <a:solidFill>
                   <a:srgbClr val="AEB6C8"/>
                 </a:solidFill>
-                <a:latin typeface="Calibri" pitchFamily="34" charset="0"/>
-                <a:ea typeface="Calibri" pitchFamily="34" charset="-122"/>
-                <a:cs typeface="Calibri" pitchFamily="34" charset="-120"/>
+                <a:latin typeface="Arial" pitchFamily="34" charset="0"/>
+                <a:ea typeface="Arial" pitchFamily="34" charset="-122"/>
+                <a:cs typeface="Arial" pitchFamily="34" charset="-120"/>
               </a:rPr>
               <a:t>Touched-but-unchanged accounts counted as writes — every contract workload serialised through its own contract.</a:t>
             </a:r>
@@ -9626,9 +8411,9 @@
                 <a:solidFill>
                   <a:srgbClr val="AEB6C8"/>
                 </a:solidFill>
-                <a:latin typeface="Calibri" pitchFamily="34" charset="0"/>
-                <a:ea typeface="Calibri" pitchFamily="34" charset="-122"/>
-                <a:cs typeface="Calibri" pitchFamily="34" charset="-120"/>
+                <a:latin typeface="Arial" pitchFamily="34" charset="0"/>
+                <a:ea typeface="Arial" pitchFamily="34" charset="-122"/>
+                <a:cs typeface="Arial" pitchFamily="34" charset="-120"/>
               </a:rPr>
               <a:t>A read race under account granularity let a stale nonce pass validation — appeared once in a full run, reproduced by a stress test in 0.5 s.</a:t>
             </a:r>
@@ -9697,9 +8482,9 @@
                 <a:solidFill>
                   <a:srgbClr val="EB6834"/>
                 </a:solidFill>
-                <a:latin typeface="Calibri" pitchFamily="34" charset="0"/>
-                <a:ea typeface="Calibri" pitchFamily="34" charset="-122"/>
-                <a:cs typeface="Calibri" pitchFamily="34" charset="-120"/>
+                <a:latin typeface="Arial" pitchFamily="34" charset="0"/>
+                <a:ea typeface="Arial" pitchFamily="34" charset="-122"/>
+                <a:cs typeface="Arial" pitchFamily="34" charset="-120"/>
               </a:rPr>
               <a:t>RESULT 1</a:t>
             </a:r>
@@ -9732,17 +8517,17 @@
               <a:buNone/>
             </a:pPr>
             <a:r>
-              <a:rPr lang="en-US" sz="3200" b="1" dirty="0">
+              <a:rPr lang="en-US" sz="2800" b="1" dirty="0">
                 <a:solidFill>
                   <a:srgbClr val="14181F"/>
                 </a:solidFill>
-                <a:latin typeface="Calibri" pitchFamily="34" charset="0"/>
-                <a:ea typeface="Calibri" pitchFamily="34" charset="-122"/>
-                <a:cs typeface="Calibri" pitchFamily="34" charset="-120"/>
+                <a:latin typeface="Arial" pitchFamily="34" charset="0"/>
+                <a:ea typeface="Arial" pitchFamily="34" charset="-122"/>
+                <a:cs typeface="Arial" pitchFamily="34" charset="-120"/>
               </a:rPr>
               <a:t>Three regimes: scales, scales a little, gets slower</a:t>
             </a:r>
-            <a:endParaRPr lang="en-US" sz="3200" dirty="0"/>
+            <a:endParaRPr lang="en-US" sz="2800" dirty="0"/>
           </a:p>
         </p:txBody>
       </p:sp>
@@ -9802,9 +8587,9 @@
                 <a:solidFill>
                   <a:srgbClr val="14181F"/>
                 </a:solidFill>
-                <a:latin typeface="Calibri" pitchFamily="34" charset="0"/>
-                <a:ea typeface="Calibri" pitchFamily="34" charset="-122"/>
-                <a:cs typeface="Calibri" pitchFamily="34" charset="-120"/>
+                <a:latin typeface="Arial" pitchFamily="34" charset="0"/>
+                <a:ea typeface="Arial" pitchFamily="34" charset="-122"/>
+                <a:cs typeface="Arial" pitchFamily="34" charset="-120"/>
               </a:rPr>
               <a:t>Independent and heavy</a:t>
             </a:r>
@@ -9844,9 +8629,9 @@
                 <a:solidFill>
                   <a:srgbClr val="14181F"/>
                 </a:solidFill>
-                <a:latin typeface="Calibri" pitchFamily="34" charset="0"/>
-                <a:ea typeface="Calibri" pitchFamily="34" charset="-122"/>
-                <a:cs typeface="Calibri" pitchFamily="34" charset="-120"/>
+                <a:latin typeface="Arial" pitchFamily="34" charset="0"/>
+                <a:ea typeface="Arial" pitchFamily="34" charset="-122"/>
+                <a:cs typeface="Arial" pitchFamily="34" charset="-120"/>
               </a:rPr>
               <a:t>compute calls reach 5.2× at 6 threads and keep climbing onto efficiency cores.</a:t>
             </a:r>
@@ -9886,9 +8671,9 @@
                 <a:solidFill>
                   <a:srgbClr val="14181F"/>
                 </a:solidFill>
-                <a:latin typeface="Calibri" pitchFamily="34" charset="0"/>
-                <a:ea typeface="Calibri" pitchFamily="34" charset="-122"/>
-                <a:cs typeface="Calibri" pitchFamily="34" charset="-120"/>
+                <a:latin typeface="Arial" pitchFamily="34" charset="0"/>
+                <a:ea typeface="Arial" pitchFamily="34" charset="-122"/>
+                <a:cs typeface="Arial" pitchFamily="34" charset="-120"/>
               </a:rPr>
               <a:t>Independent and light</a:t>
             </a:r>
@@ -9928,9 +8713,9 @@
                 <a:solidFill>
                   <a:srgbClr val="14181F"/>
                 </a:solidFill>
-                <a:latin typeface="Calibri" pitchFamily="34" charset="0"/>
-                <a:ea typeface="Calibri" pitchFamily="34" charset="-122"/>
-                <a:cs typeface="Calibri" pitchFamily="34" charset="-120"/>
+                <a:latin typeface="Arial" pitchFamily="34" charset="0"/>
+                <a:ea typeface="Arial" pitchFamily="34" charset="-122"/>
+                <a:cs typeface="Arial" pitchFamily="34" charset="-120"/>
               </a:rPr>
               <a:t>ETH and ERC-20 transfers peak at 1.4–3.0× around 4–6 threads, then lose speed on efficiency cores.</a:t>
             </a:r>
@@ -9970,9 +8755,9 @@
                 <a:solidFill>
                   <a:srgbClr val="14181F"/>
                 </a:solidFill>
-                <a:latin typeface="Calibri" pitchFamily="34" charset="0"/>
-                <a:ea typeface="Calibri" pitchFamily="34" charset="-122"/>
-                <a:cs typeface="Calibri" pitchFamily="34" charset="-120"/>
+                <a:latin typeface="Arial" pitchFamily="34" charset="0"/>
+                <a:ea typeface="Arial" pitchFamily="34" charset="-122"/>
+                <a:cs typeface="Arial" pitchFamily="34" charset="-120"/>
               </a:rPr>
               <a:t>Dependent</a:t>
             </a:r>
@@ -10012,9 +8797,9 @@
                 <a:solidFill>
                   <a:srgbClr val="14181F"/>
                 </a:solidFill>
-                <a:latin typeface="Calibri" pitchFamily="34" charset="0"/>
-                <a:ea typeface="Calibri" pitchFamily="34" charset="-122"/>
-                <a:cs typeface="Calibri" pitchFamily="34" charset="-120"/>
+                <a:latin typeface="Arial" pitchFamily="34" charset="0"/>
+                <a:ea typeface="Arial" pitchFamily="34" charset="-122"/>
+                <a:cs typeface="Arial" pitchFamily="34" charset="-120"/>
               </a:rPr>
               <a:t>NFT mint and one AMM pool: every scheduler is slower than sequential.</a:t>
             </a:r>
@@ -10051,9 +8836,9 @@
                 <a:solidFill>
                   <a:srgbClr val="5A6272"/>
                 </a:solidFill>
-                <a:latin typeface="Calibri" pitchFamily="34" charset="0"/>
-                <a:ea typeface="Calibri" pitchFamily="34" charset="-122"/>
-                <a:cs typeface="Calibri" pitchFamily="34" charset="-120"/>
+                <a:latin typeface="Arial" pitchFamily="34" charset="0"/>
+                <a:ea typeface="Arial" pitchFamily="34" charset="-122"/>
+                <a:cs typeface="Arial" pitchFamily="34" charset="-120"/>
               </a:rPr>
               <a:t>Shaded: threads beyond the 6 performance cores. Median of 5 runs; every run verified.</a:t>
             </a:r>
@@ -10122,9 +8907,9 @@
                 <a:solidFill>
                   <a:srgbClr val="EB6834"/>
                 </a:solidFill>
-                <a:latin typeface="Calibri" pitchFamily="34" charset="0"/>
-                <a:ea typeface="Calibri" pitchFamily="34" charset="-122"/>
-                <a:cs typeface="Calibri" pitchFamily="34" charset="-120"/>
+                <a:latin typeface="Arial" pitchFamily="34" charset="0"/>
+                <a:ea typeface="Arial" pitchFamily="34" charset="-122"/>
+                <a:cs typeface="Arial" pitchFamily="34" charset="-120"/>
               </a:rPr>
               <a:t>RESULT 2</a:t>
             </a:r>
@@ -10157,17 +8942,17 @@
               <a:buNone/>
             </a:pPr>
             <a:r>
-              <a:rPr lang="en-US" sz="3200" b="1" dirty="0">
+              <a:rPr lang="en-US" sz="2800" b="1" dirty="0">
                 <a:solidFill>
                   <a:srgbClr val="14181F"/>
                 </a:solidFill>
-                <a:latin typeface="Calibri" pitchFamily="34" charset="0"/>
-                <a:ea typeface="Calibri" pitchFamily="34" charset="-122"/>
-                <a:cs typeface="Calibri" pitchFamily="34" charset="-120"/>
+                <a:latin typeface="Arial" pitchFamily="34" charset="0"/>
+                <a:ea typeface="Arial" pitchFamily="34" charset="-122"/>
+                <a:cs typeface="Arial" pitchFamily="34" charset="-120"/>
               </a:rPr>
               <a:t>Chain length kills speedup — not how many transactions conflict</a:t>
             </a:r>
-            <a:endParaRPr lang="en-US" sz="3200" dirty="0"/>
+            <a:endParaRPr lang="en-US" sz="2800" dirty="0"/>
           </a:p>
         </p:txBody>
       </p:sp>
@@ -10227,9 +9012,9 @@
                 <a:solidFill>
                   <a:srgbClr val="5A6272"/>
                 </a:solidFill>
-                <a:latin typeface="Calibri" pitchFamily="34" charset="0"/>
-                <a:ea typeface="Calibri" pitchFamily="34" charset="-122"/>
-                <a:cs typeface="Calibri" pitchFamily="34" charset="-120"/>
+                <a:latin typeface="Arial" pitchFamily="34" charset="0"/>
+                <a:ea typeface="Arial" pitchFamily="34" charset="-122"/>
+                <a:cs typeface="Arial" pitchFamily="34" charset="-120"/>
               </a:rPr>
               <a:t>Block-STM, 6 threads</a:t>
             </a:r>
@@ -10279,16 +9064,16 @@
                           <a:solidFill>
                             <a:srgbClr val="5A6272"/>
                           </a:solidFill>
-                          <a:latin typeface="Calibri" pitchFamily="34" charset="0"/>
-                          <a:ea typeface="Calibri" pitchFamily="34" charset="-122"/>
-                          <a:cs typeface="Calibri" pitchFamily="34" charset="-120"/>
+                          <a:latin typeface="Arial" pitchFamily="34" charset="0"/>
+                          <a:ea typeface="Arial" pitchFamily="34" charset="-122"/>
+                          <a:cs typeface="Arial" pitchFamily="34" charset="-120"/>
                         </a:rPr>
                         <a:t>Workload</a:t>
                       </a:r>
                       <a:endParaRPr lang="en-US" sz="1300" dirty="0">
-                        <a:latin typeface="Calibri" charset="0"/>
-                        <a:ea typeface="Calibri" charset="0"/>
-                        <a:cs typeface="Calibri" charset="0"/>
+                        <a:latin typeface="Arial" charset="0"/>
+                        <a:ea typeface="Arial" charset="0"/>
+                        <a:cs typeface="Arial" charset="0"/>
                       </a:endParaRPr>
                     </a:p>
                   </a:txBody>
@@ -10326,16 +9111,16 @@
                           <a:solidFill>
                             <a:srgbClr val="5A6272"/>
                           </a:solidFill>
-                          <a:latin typeface="Calibri" pitchFamily="34" charset="0"/>
-                          <a:ea typeface="Calibri" pitchFamily="34" charset="-122"/>
-                          <a:cs typeface="Calibri" pitchFamily="34" charset="-120"/>
+                          <a:latin typeface="Arial" pitchFamily="34" charset="0"/>
+                          <a:ea typeface="Arial" pitchFamily="34" charset="-122"/>
+                          <a:cs typeface="Arial" pitchFamily="34" charset="-120"/>
                         </a:rPr>
                         <a:t>Density</a:t>
                       </a:r>
                       <a:endParaRPr lang="en-US" sz="1300" dirty="0">
-                        <a:latin typeface="Calibri" charset="0"/>
-                        <a:ea typeface="Calibri" charset="0"/>
-                        <a:cs typeface="Calibri" charset="0"/>
+                        <a:latin typeface="Arial" charset="0"/>
+                        <a:ea typeface="Arial" charset="0"/>
+                        <a:cs typeface="Arial" charset="0"/>
                       </a:endParaRPr>
                     </a:p>
                   </a:txBody>
@@ -10373,16 +9158,16 @@
                           <a:solidFill>
                             <a:srgbClr val="5A6272"/>
                           </a:solidFill>
-                          <a:latin typeface="Calibri" pitchFamily="34" charset="0"/>
-                          <a:ea typeface="Calibri" pitchFamily="34" charset="-122"/>
-                          <a:cs typeface="Calibri" pitchFamily="34" charset="-120"/>
+                          <a:latin typeface="Arial" pitchFamily="34" charset="0"/>
+                          <a:ea typeface="Arial" pitchFamily="34" charset="-122"/>
+                          <a:cs typeface="Arial" pitchFamily="34" charset="-120"/>
                         </a:rPr>
                         <a:t>Chain</a:t>
                       </a:r>
                       <a:endParaRPr lang="en-US" sz="1300" dirty="0">
-                        <a:latin typeface="Calibri" charset="0"/>
-                        <a:ea typeface="Calibri" charset="0"/>
-                        <a:cs typeface="Calibri" charset="0"/>
+                        <a:latin typeface="Arial" charset="0"/>
+                        <a:ea typeface="Arial" charset="0"/>
+                        <a:cs typeface="Arial" charset="0"/>
                       </a:endParaRPr>
                     </a:p>
                   </a:txBody>
@@ -10420,16 +9205,16 @@
                           <a:solidFill>
                             <a:srgbClr val="5A6272"/>
                           </a:solidFill>
-                          <a:latin typeface="Calibri" pitchFamily="34" charset="0"/>
-                          <a:ea typeface="Calibri" pitchFamily="34" charset="-122"/>
-                          <a:cs typeface="Calibri" pitchFamily="34" charset="-120"/>
+                          <a:latin typeface="Arial" pitchFamily="34" charset="0"/>
+                          <a:ea typeface="Arial" pitchFamily="34" charset="-122"/>
+                          <a:cs typeface="Arial" pitchFamily="34" charset="-120"/>
                         </a:rPr>
                         <a:t>Speedup</a:t>
                       </a:r>
                       <a:endParaRPr lang="en-US" sz="1300" dirty="0">
-                        <a:latin typeface="Calibri" charset="0"/>
-                        <a:ea typeface="Calibri" charset="0"/>
-                        <a:cs typeface="Calibri" charset="0"/>
+                        <a:latin typeface="Arial" charset="0"/>
+                        <a:ea typeface="Arial" charset="0"/>
+                        <a:cs typeface="Arial" charset="0"/>
                       </a:endParaRPr>
                     </a:p>
                   </a:txBody>
@@ -10469,16 +9254,16 @@
                           <a:solidFill>
                             <a:srgbClr val="14181F"/>
                           </a:solidFill>
-                          <a:latin typeface="Calibri" pitchFamily="34" charset="0"/>
-                          <a:ea typeface="Calibri" pitchFamily="34" charset="-122"/>
-                          <a:cs typeface="Calibri" pitchFamily="34" charset="-120"/>
+                          <a:latin typeface="Arial" pitchFamily="34" charset="0"/>
+                          <a:ea typeface="Arial" pitchFamily="34" charset="-122"/>
+                          <a:cs typeface="Arial" pitchFamily="34" charset="-120"/>
                         </a:rPr>
                         <a:t>transfers, r = 1</a:t>
                       </a:r>
                       <a:endParaRPr lang="en-US" sz="1300" dirty="0">
-                        <a:latin typeface="Calibri" charset="0"/>
-                        <a:ea typeface="Calibri" charset="0"/>
-                        <a:cs typeface="Calibri" charset="0"/>
+                        <a:latin typeface="Arial" charset="0"/>
+                        <a:ea typeface="Arial" charset="0"/>
+                        <a:cs typeface="Arial" charset="0"/>
                       </a:endParaRPr>
                     </a:p>
                   </a:txBody>
@@ -10516,16 +9301,16 @@
                           <a:solidFill>
                             <a:srgbClr val="14181F"/>
                           </a:solidFill>
-                          <a:latin typeface="Calibri" pitchFamily="34" charset="0"/>
-                          <a:ea typeface="Calibri" pitchFamily="34" charset="-122"/>
-                          <a:cs typeface="Calibri" pitchFamily="34" charset="-120"/>
+                          <a:latin typeface="Arial" pitchFamily="34" charset="0"/>
+                          <a:ea typeface="Arial" pitchFamily="34" charset="-122"/>
+                          <a:cs typeface="Arial" pitchFamily="34" charset="-120"/>
                         </a:rPr>
                         <a:t>0.75</a:t>
                       </a:r>
                       <a:endParaRPr lang="en-US" sz="1300" dirty="0">
-                        <a:latin typeface="Calibri" charset="0"/>
-                        <a:ea typeface="Calibri" charset="0"/>
-                        <a:cs typeface="Calibri" charset="0"/>
+                        <a:latin typeface="Arial" charset="0"/>
+                        <a:ea typeface="Arial" charset="0"/>
+                        <a:cs typeface="Arial" charset="0"/>
                       </a:endParaRPr>
                     </a:p>
                   </a:txBody>
@@ -10563,16 +9348,16 @@
                           <a:solidFill>
                             <a:srgbClr val="14181F"/>
                           </a:solidFill>
-                          <a:latin typeface="Calibri" pitchFamily="34" charset="0"/>
-                          <a:ea typeface="Calibri" pitchFamily="34" charset="-122"/>
-                          <a:cs typeface="Calibri" pitchFamily="34" charset="-120"/>
+                          <a:latin typeface="Arial" pitchFamily="34" charset="0"/>
+                          <a:ea typeface="Arial" pitchFamily="34" charset="-122"/>
+                          <a:cs typeface="Arial" pitchFamily="34" charset="-120"/>
                         </a:rPr>
                         <a:t>11</a:t>
                       </a:r>
                       <a:endParaRPr lang="en-US" sz="1300" dirty="0">
-                        <a:latin typeface="Calibri" charset="0"/>
-                        <a:ea typeface="Calibri" charset="0"/>
-                        <a:cs typeface="Calibri" charset="0"/>
+                        <a:latin typeface="Arial" charset="0"/>
+                        <a:ea typeface="Arial" charset="0"/>
+                        <a:cs typeface="Arial" charset="0"/>
                       </a:endParaRPr>
                     </a:p>
                   </a:txBody>
@@ -10610,16 +9395,16 @@
                           <a:solidFill>
                             <a:srgbClr val="14181F"/>
                           </a:solidFill>
-                          <a:latin typeface="Calibri" pitchFamily="34" charset="0"/>
-                          <a:ea typeface="Calibri" pitchFamily="34" charset="-122"/>
-                          <a:cs typeface="Calibri" pitchFamily="34" charset="-120"/>
+                          <a:latin typeface="Arial" pitchFamily="34" charset="0"/>
+                          <a:ea typeface="Arial" pitchFamily="34" charset="-122"/>
+                          <a:cs typeface="Arial" pitchFamily="34" charset="-120"/>
                         </a:rPr>
                         <a:t>1.29×</a:t>
                       </a:r>
                       <a:endParaRPr lang="en-US" sz="1300" dirty="0">
-                        <a:latin typeface="Calibri" charset="0"/>
-                        <a:ea typeface="Calibri" charset="0"/>
-                        <a:cs typeface="Calibri" charset="0"/>
+                        <a:latin typeface="Arial" charset="0"/>
+                        <a:ea typeface="Arial" charset="0"/>
+                        <a:cs typeface="Arial" charset="0"/>
                       </a:endParaRPr>
                     </a:p>
                   </a:txBody>
@@ -10659,16 +9444,16 @@
                           <a:solidFill>
                             <a:srgbClr val="14181F"/>
                           </a:solidFill>
-                          <a:latin typeface="Calibri" pitchFamily="34" charset="0"/>
-                          <a:ea typeface="Calibri" pitchFamily="34" charset="-122"/>
-                          <a:cs typeface="Calibri" pitchFamily="34" charset="-120"/>
+                          <a:latin typeface="Arial" pitchFamily="34" charset="0"/>
+                          <a:ea typeface="Arial" pitchFamily="34" charset="-122"/>
+                          <a:cs typeface="Arial" pitchFamily="34" charset="-120"/>
                         </a:rPr>
                         <a:t>transfers, Zipf 0.8</a:t>
                       </a:r>
                       <a:endParaRPr lang="en-US" sz="1300" dirty="0">
-                        <a:latin typeface="Calibri" charset="0"/>
-                        <a:ea typeface="Calibri" charset="0"/>
-                        <a:cs typeface="Calibri" charset="0"/>
+                        <a:latin typeface="Arial" charset="0"/>
+                        <a:ea typeface="Arial" charset="0"/>
+                        <a:cs typeface="Arial" charset="0"/>
                       </a:endParaRPr>
                     </a:p>
                   </a:txBody>
@@ -10706,16 +9491,16 @@
                           <a:solidFill>
                             <a:srgbClr val="14181F"/>
                           </a:solidFill>
-                          <a:latin typeface="Calibri" pitchFamily="34" charset="0"/>
-                          <a:ea typeface="Calibri" pitchFamily="34" charset="-122"/>
-                          <a:cs typeface="Calibri" pitchFamily="34" charset="-120"/>
+                          <a:latin typeface="Arial" pitchFamily="34" charset="0"/>
+                          <a:ea typeface="Arial" pitchFamily="34" charset="-122"/>
+                          <a:cs typeface="Arial" pitchFamily="34" charset="-120"/>
                         </a:rPr>
                         <a:t>0.81</a:t>
                       </a:r>
                       <a:endParaRPr lang="en-US" sz="1300" dirty="0">
-                        <a:latin typeface="Calibri" charset="0"/>
-                        <a:ea typeface="Calibri" charset="0"/>
-                        <a:cs typeface="Calibri" charset="0"/>
+                        <a:latin typeface="Arial" charset="0"/>
+                        <a:ea typeface="Arial" charset="0"/>
+                        <a:cs typeface="Arial" charset="0"/>
                       </a:endParaRPr>
                     </a:p>
                   </a:txBody>
@@ -10753,16 +9538,16 @@
                           <a:solidFill>
                             <a:srgbClr val="14181F"/>
                           </a:solidFill>
-                          <a:latin typeface="Calibri" pitchFamily="34" charset="0"/>
-                          <a:ea typeface="Calibri" pitchFamily="34" charset="-122"/>
-                          <a:cs typeface="Calibri" pitchFamily="34" charset="-120"/>
+                          <a:latin typeface="Arial" pitchFamily="34" charset="0"/>
+                          <a:ea typeface="Arial" pitchFamily="34" charset="-122"/>
+                          <a:cs typeface="Arial" pitchFamily="34" charset="-120"/>
                         </a:rPr>
                         <a:t>110</a:t>
                       </a:r>
                       <a:endParaRPr lang="en-US" sz="1300" dirty="0">
-                        <a:latin typeface="Calibri" charset="0"/>
-                        <a:ea typeface="Calibri" charset="0"/>
-                        <a:cs typeface="Calibri" charset="0"/>
+                        <a:latin typeface="Arial" charset="0"/>
+                        <a:ea typeface="Arial" charset="0"/>
+                        <a:cs typeface="Arial" charset="0"/>
                       </a:endParaRPr>
                     </a:p>
                   </a:txBody>
@@ -10800,16 +9585,16 @@
                           <a:solidFill>
                             <a:srgbClr val="14181F"/>
                           </a:solidFill>
-                          <a:latin typeface="Calibri" pitchFamily="34" charset="0"/>
-                          <a:ea typeface="Calibri" pitchFamily="34" charset="-122"/>
-                          <a:cs typeface="Calibri" pitchFamily="34" charset="-120"/>
+                          <a:latin typeface="Arial" pitchFamily="34" charset="0"/>
+                          <a:ea typeface="Arial" pitchFamily="34" charset="-122"/>
+                          <a:cs typeface="Arial" pitchFamily="34" charset="-120"/>
                         </a:rPr>
                         <a:t>1.26×</a:t>
                       </a:r>
                       <a:endParaRPr lang="en-US" sz="1300" dirty="0">
-                        <a:latin typeface="Calibri" charset="0"/>
-                        <a:ea typeface="Calibri" charset="0"/>
-                        <a:cs typeface="Calibri" charset="0"/>
+                        <a:latin typeface="Arial" charset="0"/>
+                        <a:ea typeface="Arial" charset="0"/>
+                        <a:cs typeface="Arial" charset="0"/>
                       </a:endParaRPr>
                     </a:p>
                   </a:txBody>
@@ -10849,16 +9634,16 @@
                           <a:solidFill>
                             <a:srgbClr val="14181F"/>
                           </a:solidFill>
-                          <a:latin typeface="Calibri" pitchFamily="34" charset="0"/>
-                          <a:ea typeface="Calibri" pitchFamily="34" charset="-122"/>
-                          <a:cs typeface="Calibri" pitchFamily="34" charset="-120"/>
+                          <a:latin typeface="Arial" pitchFamily="34" charset="0"/>
+                          <a:ea typeface="Arial" pitchFamily="34" charset="-122"/>
+                          <a:cs typeface="Arial" pitchFamily="34" charset="-120"/>
                         </a:rPr>
                         <a:t>transfers, Zipf 1.2</a:t>
                       </a:r>
                       <a:endParaRPr lang="en-US" sz="1300" dirty="0">
-                        <a:latin typeface="Calibri" charset="0"/>
-                        <a:ea typeface="Calibri" charset="0"/>
-                        <a:cs typeface="Calibri" charset="0"/>
+                        <a:latin typeface="Arial" charset="0"/>
+                        <a:ea typeface="Arial" charset="0"/>
+                        <a:cs typeface="Arial" charset="0"/>
                       </a:endParaRPr>
                     </a:p>
                   </a:txBody>
@@ -10896,16 +9681,16 @@
                           <a:solidFill>
                             <a:srgbClr val="14181F"/>
                           </a:solidFill>
-                          <a:latin typeface="Calibri" pitchFamily="34" charset="0"/>
-                          <a:ea typeface="Calibri" pitchFamily="34" charset="-122"/>
-                          <a:cs typeface="Calibri" pitchFamily="34" charset="-120"/>
+                          <a:latin typeface="Arial" pitchFamily="34" charset="0"/>
+                          <a:ea typeface="Arial" pitchFamily="34" charset="-122"/>
+                          <a:cs typeface="Arial" pitchFamily="34" charset="-120"/>
                         </a:rPr>
                         <a:t>0.90</a:t>
                       </a:r>
                       <a:endParaRPr lang="en-US" sz="1300" dirty="0">
-                        <a:latin typeface="Calibri" charset="0"/>
-                        <a:ea typeface="Calibri" charset="0"/>
-                        <a:cs typeface="Calibri" charset="0"/>
+                        <a:latin typeface="Arial" charset="0"/>
+                        <a:ea typeface="Arial" charset="0"/>
+                        <a:cs typeface="Arial" charset="0"/>
                       </a:endParaRPr>
                     </a:p>
                   </a:txBody>
@@ -10943,16 +9728,16 @@
                           <a:solidFill>
                             <a:srgbClr val="14181F"/>
                           </a:solidFill>
-                          <a:latin typeface="Calibri" pitchFamily="34" charset="0"/>
-                          <a:ea typeface="Calibri" pitchFamily="34" charset="-122"/>
-                          <a:cs typeface="Calibri" pitchFamily="34" charset="-120"/>
+                          <a:latin typeface="Arial" pitchFamily="34" charset="0"/>
+                          <a:ea typeface="Arial" pitchFamily="34" charset="-122"/>
+                          <a:cs typeface="Arial" pitchFamily="34" charset="-120"/>
                         </a:rPr>
                         <a:t>432</a:t>
                       </a:r>
                       <a:endParaRPr lang="en-US" sz="1300" dirty="0">
-                        <a:latin typeface="Calibri" charset="0"/>
-                        <a:ea typeface="Calibri" charset="0"/>
-                        <a:cs typeface="Calibri" charset="0"/>
+                        <a:latin typeface="Arial" charset="0"/>
+                        <a:ea typeface="Arial" charset="0"/>
+                        <a:cs typeface="Arial" charset="0"/>
                       </a:endParaRPr>
                     </a:p>
                   </a:txBody>
@@ -10990,16 +9775,16 @@
                           <a:solidFill>
                             <a:srgbClr val="14181F"/>
                           </a:solidFill>
-                          <a:latin typeface="Calibri" pitchFamily="34" charset="0"/>
-                          <a:ea typeface="Calibri" pitchFamily="34" charset="-122"/>
-                          <a:cs typeface="Calibri" pitchFamily="34" charset="-120"/>
+                          <a:latin typeface="Arial" pitchFamily="34" charset="0"/>
+                          <a:ea typeface="Arial" pitchFamily="34" charset="-122"/>
+                          <a:cs typeface="Arial" pitchFamily="34" charset="-120"/>
                         </a:rPr>
                         <a:t>1.07×</a:t>
                       </a:r>
                       <a:endParaRPr lang="en-US" sz="1300" dirty="0">
-                        <a:latin typeface="Calibri" charset="0"/>
-                        <a:ea typeface="Calibri" charset="0"/>
-                        <a:cs typeface="Calibri" charset="0"/>
+                        <a:latin typeface="Arial" charset="0"/>
+                        <a:ea typeface="Arial" charset="0"/>
+                        <a:cs typeface="Arial" charset="0"/>
                       </a:endParaRPr>
                     </a:p>
                   </a:txBody>
@@ -11039,16 +9824,16 @@
                           <a:solidFill>
                             <a:srgbClr val="14181F"/>
                           </a:solidFill>
-                          <a:latin typeface="Calibri" pitchFamily="34" charset="0"/>
-                          <a:ea typeface="Calibri" pitchFamily="34" charset="-122"/>
-                          <a:cs typeface="Calibri" pitchFamily="34" charset="-120"/>
+                          <a:latin typeface="Arial" pitchFamily="34" charset="0"/>
+                          <a:ea typeface="Arial" pitchFamily="34" charset="-122"/>
+                          <a:cs typeface="Arial" pitchFamily="34" charset="-120"/>
                         </a:rPr>
                         <a:t>ERC-20, Zipf 1.2</a:t>
                       </a:r>
                       <a:endParaRPr lang="en-US" sz="1300" dirty="0">
-                        <a:latin typeface="Calibri" charset="0"/>
-                        <a:ea typeface="Calibri" charset="0"/>
-                        <a:cs typeface="Calibri" charset="0"/>
+                        <a:latin typeface="Arial" charset="0"/>
+                        <a:ea typeface="Arial" charset="0"/>
+                        <a:cs typeface="Arial" charset="0"/>
                       </a:endParaRPr>
                     </a:p>
                   </a:txBody>
@@ -11086,16 +9871,16 @@
                           <a:solidFill>
                             <a:srgbClr val="14181F"/>
                           </a:solidFill>
-                          <a:latin typeface="Calibri" pitchFamily="34" charset="0"/>
-                          <a:ea typeface="Calibri" pitchFamily="34" charset="-122"/>
-                          <a:cs typeface="Calibri" pitchFamily="34" charset="-120"/>
+                          <a:latin typeface="Arial" pitchFamily="34" charset="0"/>
+                          <a:ea typeface="Arial" pitchFamily="34" charset="-122"/>
+                          <a:cs typeface="Arial" pitchFamily="34" charset="-120"/>
                         </a:rPr>
                         <a:t>0.90</a:t>
                       </a:r>
                       <a:endParaRPr lang="en-US" sz="1300" dirty="0">
-                        <a:latin typeface="Calibri" charset="0"/>
-                        <a:ea typeface="Calibri" charset="0"/>
-                        <a:cs typeface="Calibri" charset="0"/>
+                        <a:latin typeface="Arial" charset="0"/>
+                        <a:ea typeface="Arial" charset="0"/>
+                        <a:cs typeface="Arial" charset="0"/>
                       </a:endParaRPr>
                     </a:p>
                   </a:txBody>
@@ -11133,16 +9918,16 @@
                           <a:solidFill>
                             <a:srgbClr val="14181F"/>
                           </a:solidFill>
-                          <a:latin typeface="Calibri" pitchFamily="34" charset="0"/>
-                          <a:ea typeface="Calibri" pitchFamily="34" charset="-122"/>
-                          <a:cs typeface="Calibri" pitchFamily="34" charset="-120"/>
+                          <a:latin typeface="Arial" pitchFamily="34" charset="0"/>
+                          <a:ea typeface="Arial" pitchFamily="34" charset="-122"/>
+                          <a:cs typeface="Arial" pitchFamily="34" charset="-120"/>
                         </a:rPr>
                         <a:t>432</a:t>
                       </a:r>
                       <a:endParaRPr lang="en-US" sz="1300" dirty="0">
-                        <a:latin typeface="Calibri" charset="0"/>
-                        <a:ea typeface="Calibri" charset="0"/>
-                        <a:cs typeface="Calibri" charset="0"/>
+                        <a:latin typeface="Arial" charset="0"/>
+                        <a:ea typeface="Arial" charset="0"/>
+                        <a:cs typeface="Arial" charset="0"/>
                       </a:endParaRPr>
                     </a:p>
                   </a:txBody>
@@ -11180,16 +9965,16 @@
                           <a:solidFill>
                             <a:srgbClr val="14181F"/>
                           </a:solidFill>
-                          <a:latin typeface="Calibri" pitchFamily="34" charset="0"/>
-                          <a:ea typeface="Calibri" pitchFamily="34" charset="-122"/>
-                          <a:cs typeface="Calibri" pitchFamily="34" charset="-120"/>
+                          <a:latin typeface="Arial" pitchFamily="34" charset="0"/>
+                          <a:ea typeface="Arial" pitchFamily="34" charset="-122"/>
+                          <a:cs typeface="Arial" pitchFamily="34" charset="-120"/>
                         </a:rPr>
                         <a:t>1.67×</a:t>
                       </a:r>
                       <a:endParaRPr lang="en-US" sz="1300" dirty="0">
-                        <a:latin typeface="Calibri" charset="0"/>
-                        <a:ea typeface="Calibri" charset="0"/>
-                        <a:cs typeface="Calibri" charset="0"/>
+                        <a:latin typeface="Arial" charset="0"/>
+                        <a:ea typeface="Arial" charset="0"/>
+                        <a:cs typeface="Arial" charset="0"/>
                       </a:endParaRPr>
                     </a:p>
                   </a:txBody>
@@ -11229,16 +10014,16 @@
                           <a:solidFill>
                             <a:srgbClr val="14181F"/>
                           </a:solidFill>
-                          <a:latin typeface="Calibri" pitchFamily="34" charset="0"/>
-                          <a:ea typeface="Calibri" pitchFamily="34" charset="-122"/>
-                          <a:cs typeface="Calibri" pitchFamily="34" charset="-120"/>
+                          <a:latin typeface="Arial" pitchFamily="34" charset="0"/>
+                          <a:ea typeface="Arial" pitchFamily="34" charset="-122"/>
+                          <a:cs typeface="Arial" pitchFamily="34" charset="-120"/>
                         </a:rPr>
                         <a:t>transfers, Zipf 2.0</a:t>
                       </a:r>
                       <a:endParaRPr lang="en-US" sz="1300" dirty="0">
-                        <a:latin typeface="Calibri" charset="0"/>
-                        <a:ea typeface="Calibri" charset="0"/>
-                        <a:cs typeface="Calibri" charset="0"/>
+                        <a:latin typeface="Arial" charset="0"/>
+                        <a:ea typeface="Arial" charset="0"/>
+                        <a:cs typeface="Arial" charset="0"/>
                       </a:endParaRPr>
                     </a:p>
                   </a:txBody>
@@ -11276,16 +10061,16 @@
                           <a:solidFill>
                             <a:srgbClr val="14181F"/>
                           </a:solidFill>
-                          <a:latin typeface="Calibri" pitchFamily="34" charset="0"/>
-                          <a:ea typeface="Calibri" pitchFamily="34" charset="-122"/>
-                          <a:cs typeface="Calibri" pitchFamily="34" charset="-120"/>
+                          <a:latin typeface="Arial" pitchFamily="34" charset="0"/>
+                          <a:ea typeface="Arial" pitchFamily="34" charset="-122"/>
+                          <a:cs typeface="Arial" pitchFamily="34" charset="-120"/>
                         </a:rPr>
                         <a:t>0.98</a:t>
                       </a:r>
                       <a:endParaRPr lang="en-US" sz="1300" dirty="0">
-                        <a:latin typeface="Calibri" charset="0"/>
-                        <a:ea typeface="Calibri" charset="0"/>
-                        <a:cs typeface="Calibri" charset="0"/>
+                        <a:latin typeface="Arial" charset="0"/>
+                        <a:ea typeface="Arial" charset="0"/>
+                        <a:cs typeface="Arial" charset="0"/>
                       </a:endParaRPr>
                     </a:p>
                   </a:txBody>
@@ -11323,16 +10108,16 @@
                           <a:solidFill>
                             <a:srgbClr val="14181F"/>
                           </a:solidFill>
-                          <a:latin typeface="Calibri" pitchFamily="34" charset="0"/>
-                          <a:ea typeface="Calibri" pitchFamily="34" charset="-122"/>
-                          <a:cs typeface="Calibri" pitchFamily="34" charset="-120"/>
+                          <a:latin typeface="Arial" pitchFamily="34" charset="0"/>
+                          <a:ea typeface="Arial" pitchFamily="34" charset="-122"/>
+                          <a:cs typeface="Arial" pitchFamily="34" charset="-120"/>
                         </a:rPr>
                         <a:t>1,217</a:t>
                       </a:r>
                       <a:endParaRPr lang="en-US" sz="1300" dirty="0">
-                        <a:latin typeface="Calibri" charset="0"/>
-                        <a:ea typeface="Calibri" charset="0"/>
-                        <a:cs typeface="Calibri" charset="0"/>
+                        <a:latin typeface="Arial" charset="0"/>
+                        <a:ea typeface="Arial" charset="0"/>
+                        <a:cs typeface="Arial" charset="0"/>
                       </a:endParaRPr>
                     </a:p>
                   </a:txBody>
@@ -11370,16 +10155,16 @@
                           <a:solidFill>
                             <a:srgbClr val="EB6834"/>
                           </a:solidFill>
-                          <a:latin typeface="Calibri" pitchFamily="34" charset="0"/>
-                          <a:ea typeface="Calibri" pitchFamily="34" charset="-122"/>
-                          <a:cs typeface="Calibri" pitchFamily="34" charset="-120"/>
+                          <a:latin typeface="Arial" pitchFamily="34" charset="0"/>
+                          <a:ea typeface="Arial" pitchFamily="34" charset="-122"/>
+                          <a:cs typeface="Arial" pitchFamily="34" charset="-120"/>
                         </a:rPr>
                         <a:t>0.45×</a:t>
                       </a:r>
                       <a:endParaRPr lang="en-US" sz="1300" dirty="0">
-                        <a:latin typeface="Calibri" charset="0"/>
-                        <a:ea typeface="Calibri" charset="0"/>
-                        <a:cs typeface="Calibri" charset="0"/>
+                        <a:latin typeface="Arial" charset="0"/>
+                        <a:ea typeface="Arial" charset="0"/>
+                        <a:cs typeface="Arial" charset="0"/>
                       </a:endParaRPr>
                     </a:p>
                   </a:txBody>
@@ -11419,16 +10204,16 @@
                           <a:solidFill>
                             <a:srgbClr val="14181F"/>
                           </a:solidFill>
-                          <a:latin typeface="Calibri" pitchFamily="34" charset="0"/>
-                          <a:ea typeface="Calibri" pitchFamily="34" charset="-122"/>
-                          <a:cs typeface="Calibri" pitchFamily="34" charset="-120"/>
+                          <a:latin typeface="Arial" pitchFamily="34" charset="0"/>
+                          <a:ea typeface="Arial" pitchFamily="34" charset="-122"/>
+                          <a:cs typeface="Arial" pitchFamily="34" charset="-120"/>
                         </a:rPr>
                         <a:t>NFT mint</a:t>
                       </a:r>
                       <a:endParaRPr lang="en-US" sz="1300" dirty="0">
-                        <a:latin typeface="Calibri" charset="0"/>
-                        <a:ea typeface="Calibri" charset="0"/>
-                        <a:cs typeface="Calibri" charset="0"/>
+                        <a:latin typeface="Arial" charset="0"/>
+                        <a:ea typeface="Arial" charset="0"/>
+                        <a:cs typeface="Arial" charset="0"/>
                       </a:endParaRPr>
                     </a:p>
                   </a:txBody>
@@ -11466,16 +10251,16 @@
                           <a:solidFill>
                             <a:srgbClr val="14181F"/>
                           </a:solidFill>
-                          <a:latin typeface="Calibri" pitchFamily="34" charset="0"/>
-                          <a:ea typeface="Calibri" pitchFamily="34" charset="-122"/>
-                          <a:cs typeface="Calibri" pitchFamily="34" charset="-120"/>
+                          <a:latin typeface="Arial" pitchFamily="34" charset="0"/>
+                          <a:ea typeface="Arial" pitchFamily="34" charset="-122"/>
+                          <a:cs typeface="Arial" pitchFamily="34" charset="-120"/>
                         </a:rPr>
                         <a:t>1.00</a:t>
                       </a:r>
                       <a:endParaRPr lang="en-US" sz="1300" dirty="0">
-                        <a:latin typeface="Calibri" charset="0"/>
-                        <a:ea typeface="Calibri" charset="0"/>
-                        <a:cs typeface="Calibri" charset="0"/>
+                        <a:latin typeface="Arial" charset="0"/>
+                        <a:ea typeface="Arial" charset="0"/>
+                        <a:cs typeface="Arial" charset="0"/>
                       </a:endParaRPr>
                     </a:p>
                   </a:txBody>
@@ -11513,16 +10298,16 @@
                           <a:solidFill>
                             <a:srgbClr val="14181F"/>
                           </a:solidFill>
-                          <a:latin typeface="Calibri" pitchFamily="34" charset="0"/>
-                          <a:ea typeface="Calibri" pitchFamily="34" charset="-122"/>
-                          <a:cs typeface="Calibri" pitchFamily="34" charset="-120"/>
+                          <a:latin typeface="Arial" pitchFamily="34" charset="0"/>
+                          <a:ea typeface="Arial" pitchFamily="34" charset="-122"/>
+                          <a:cs typeface="Arial" pitchFamily="34" charset="-120"/>
                         </a:rPr>
                         <a:t>2,000</a:t>
                       </a:r>
                       <a:endParaRPr lang="en-US" sz="1300" dirty="0">
-                        <a:latin typeface="Calibri" charset="0"/>
-                        <a:ea typeface="Calibri" charset="0"/>
-                        <a:cs typeface="Calibri" charset="0"/>
+                        <a:latin typeface="Arial" charset="0"/>
+                        <a:ea typeface="Arial" charset="0"/>
+                        <a:cs typeface="Arial" charset="0"/>
                       </a:endParaRPr>
                     </a:p>
                   </a:txBody>
@@ -11560,16 +10345,16 @@
                           <a:solidFill>
                             <a:srgbClr val="EB6834"/>
                           </a:solidFill>
-                          <a:latin typeface="Calibri" pitchFamily="34" charset="0"/>
-                          <a:ea typeface="Calibri" pitchFamily="34" charset="-122"/>
-                          <a:cs typeface="Calibri" pitchFamily="34" charset="-120"/>
+                          <a:latin typeface="Arial" pitchFamily="34" charset="0"/>
+                          <a:ea typeface="Arial" pitchFamily="34" charset="-122"/>
+                          <a:cs typeface="Arial" pitchFamily="34" charset="-120"/>
                         </a:rPr>
                         <a:t>0.43×</a:t>
                       </a:r>
                       <a:endParaRPr lang="en-US" sz="1300" dirty="0">
-                        <a:latin typeface="Calibri" charset="0"/>
-                        <a:ea typeface="Calibri" charset="0"/>
-                        <a:cs typeface="Calibri" charset="0"/>
+                        <a:latin typeface="Arial" charset="0"/>
+                        <a:ea typeface="Arial" charset="0"/>
+                        <a:cs typeface="Arial" charset="0"/>
                       </a:endParaRPr>
                     </a:p>
                   </a:txBody>
@@ -11631,9 +10416,9 @@
                 <a:solidFill>
                   <a:srgbClr val="14181F"/>
                 </a:solidFill>
-                <a:latin typeface="Calibri" pitchFamily="34" charset="0"/>
-                <a:ea typeface="Calibri" pitchFamily="34" charset="-122"/>
-                <a:cs typeface="Calibri" pitchFamily="34" charset="-120"/>
+                <a:latin typeface="Arial" pitchFamily="34" charset="0"/>
+                <a:ea typeface="Arial" pitchFamily="34" charset="-122"/>
+                <a:cs typeface="Arial" pitchFamily="34" charset="-120"/>
               </a:rPr>
               <a:t>Same chain, more work per transaction: ERC-20 gets 1.67× where transfers get 1.07×. Density alone does not describe a workload.</a:t>
             </a:r>
@@ -11670,9 +10455,9 @@
                 <a:solidFill>
                   <a:srgbClr val="5A6272"/>
                 </a:solidFill>
-                <a:latin typeface="Calibri" pitchFamily="34" charset="0"/>
-                <a:ea typeface="Calibri" pitchFamily="34" charset="-122"/>
-                <a:cs typeface="Calibri" pitchFamily="34" charset="-120"/>
+                <a:latin typeface="Arial" pitchFamily="34" charset="0"/>
+                <a:ea typeface="Arial" pitchFamily="34" charset="-122"/>
+                <a:cs typeface="Arial" pitchFamily="34" charset="-120"/>
               </a:rPr>
               <a:t>Density: fraction of transactions reading an earlier transaction's write, measured from a real execution.</a:t>
             </a:r>
@@ -11741,9 +10526,9 @@
                 <a:solidFill>
                   <a:srgbClr val="EB6834"/>
                 </a:solidFill>
-                <a:latin typeface="Calibri" pitchFamily="34" charset="0"/>
-                <a:ea typeface="Calibri" pitchFamily="34" charset="-122"/>
-                <a:cs typeface="Calibri" pitchFamily="34" charset="-120"/>
+                <a:latin typeface="Arial" pitchFamily="34" charset="0"/>
+                <a:ea typeface="Arial" pitchFamily="34" charset="-122"/>
+                <a:cs typeface="Arial" pitchFamily="34" charset="-120"/>
               </a:rPr>
               <a:t>RESULT 3</a:t>
             </a:r>
@@ -11776,36 +10561,44 @@
               <a:buNone/>
             </a:pPr>
             <a:r>
-              <a:rPr lang="en-US" sz="3200" b="1" dirty="0">
+              <a:rPr lang="en-US" sz="2800" b="1" dirty="0">
                 <a:solidFill>
                   <a:srgbClr val="14181F"/>
                 </a:solidFill>
-                <a:latin typeface="Calibri" pitchFamily="34" charset="0"/>
-                <a:ea typeface="Calibri" pitchFamily="34" charset="-122"/>
-                <a:cs typeface="Calibri" pitchFamily="34" charset="-120"/>
+                <a:latin typeface="Arial" pitchFamily="34" charset="0"/>
+                <a:ea typeface="Arial" pitchFamily="34" charset="-122"/>
+                <a:cs typeface="Arial" pitchFamily="34" charset="-120"/>
               </a:rPr>
               <a:t>A transaction has to do more work than it costs to coordinate</a:t>
             </a:r>
-            <a:endParaRPr lang="en-US" sz="3200" dirty="0"/>
-          </a:p>
-        </p:txBody>
-      </p:sp>
-      <p:graphicFrame>
-        <p:nvGraphicFramePr>
-          <p:cNvPr id="4" name="Chart 0" descr=""/>
-          <p:cNvGraphicFramePr/>
-          <p:nvPr/>
-        </p:nvGraphicFramePr>
-        <p:xfrm>
-          <a:off x="548640" y="1371600"/>
-          <a:ext cx="7315200" cy="4754880"/>
-        </p:xfrm>
-        <a:graphic xmlns:a="http://schemas.openxmlformats.org/drawingml/2006/main">
-          <a:graphicData uri="http://schemas.openxmlformats.org/drawingml/2006/chart">
-            <c:chart xmlns:c="http://schemas.openxmlformats.org/drawingml/2006/chart" r:id="rId1"/>
-          </a:graphicData>
-        </a:graphic>
-      </p:graphicFrame>
+            <a:endParaRPr lang="en-US" sz="2800" dirty="0"/>
+          </a:p>
+        </p:txBody>
+      </p:sp>
+      <p:pic>
+        <p:nvPicPr>
+          <p:cNvPr id="4" name="Image 0" descr="/Users/franz/Desktop/SC6109/docs/figures/fig3_speedup_by_work.png">    </p:cNvPr>
+          <p:cNvPicPr>
+            <a:picLocks noChangeAspect="1"/>
+          </p:cNvPicPr>
+          <p:nvPr/>
+        </p:nvPicPr>
+        <p:blipFill>
+          <a:blip r:embed="rId1"/>
+          <a:stretch>
+            <a:fillRect/>
+          </a:stretch>
+        </p:blipFill>
+        <p:spPr>
+          <a:xfrm>
+            <a:off x="548640" y="1463040"/>
+            <a:ext cx="7315200" cy="4149291"/>
+          </a:xfrm>
+          <a:prstGeom prst="rect">
+            <a:avLst/>
+          </a:prstGeom>
+        </p:spPr>
+      </p:pic>
       <p:sp>
         <p:nvSpPr>
           <p:cNvPr id="5" name="Text 2"/>
@@ -11835,9 +10628,9 @@
                 <a:solidFill>
                   <a:srgbClr val="EB6834"/>
                 </a:solidFill>
-                <a:latin typeface="Calibri" pitchFamily="34" charset="0"/>
-                <a:ea typeface="Calibri" pitchFamily="34" charset="-122"/>
-                <a:cs typeface="Calibri" pitchFamily="34" charset="-120"/>
+                <a:latin typeface="Arial" pitchFamily="34" charset="0"/>
+                <a:ea typeface="Arial" pitchFamily="34" charset="-122"/>
+                <a:cs typeface="Arial" pitchFamily="34" charset="-120"/>
               </a:rPr>
               <a:t>~40%</a:t>
             </a:r>
@@ -11874,9 +10667,9 @@
                 <a:solidFill>
                   <a:srgbClr val="5A6272"/>
                 </a:solidFill>
-                <a:latin typeface="Calibri" pitchFamily="34" charset="0"/>
-                <a:ea typeface="Calibri" pitchFamily="34" charset="-122"/>
-                <a:cs typeface="Calibri" pitchFamily="34" charset="-120"/>
+                <a:latin typeface="Arial" pitchFamily="34" charset="0"/>
+                <a:ea typeface="Arial" pitchFamily="34" charset="-122"/>
+                <a:cs typeface="Arial" pitchFamily="34" charset="-120"/>
               </a:rPr>
               <a:t>of sequential throughput lost to Block-STM's own machinery at one thread, on light transactions</a:t>
             </a:r>
@@ -11913,9 +10706,9 @@
                 <a:solidFill>
                   <a:srgbClr val="1BAF7A"/>
                 </a:solidFill>
-                <a:latin typeface="Calibri" pitchFamily="34" charset="0"/>
-                <a:ea typeface="Calibri" pitchFamily="34" charset="-122"/>
-                <a:cs typeface="Calibri" pitchFamily="34" charset="-120"/>
+                <a:latin typeface="Arial" pitchFamily="34" charset="0"/>
+                <a:ea typeface="Arial" pitchFamily="34" charset="-122"/>
+                <a:cs typeface="Arial" pitchFamily="34" charset="-120"/>
               </a:rPr>
               <a:t>92%</a:t>
             </a:r>
@@ -11952,9 +10745,9 @@
                 <a:solidFill>
                   <a:srgbClr val="5A6272"/>
                 </a:solidFill>
-                <a:latin typeface="Calibri" pitchFamily="34" charset="0"/>
-                <a:ea typeface="Calibri" pitchFamily="34" charset="-122"/>
-                <a:cs typeface="Calibri" pitchFamily="34" charset="-120"/>
+                <a:latin typeface="Arial" pitchFamily="34" charset="0"/>
+                <a:ea typeface="Arial" pitchFamily="34" charset="-122"/>
+                <a:cs typeface="Arial" pitchFamily="34" charset="-120"/>
               </a:rPr>
               <a:t>of linear on 6 cores once each transaction does ~78 µs of work</a:t>
             </a:r>
@@ -11991,9 +10784,9 @@
                 <a:solidFill>
                   <a:srgbClr val="5A6272"/>
                 </a:solidFill>
-                <a:latin typeface="Calibri" pitchFamily="34" charset="0"/>
-                <a:ea typeface="Calibri" pitchFamily="34" charset="-122"/>
-                <a:cs typeface="Calibri" pitchFamily="34" charset="-120"/>
+                <a:latin typeface="Arial" pitchFamily="34" charset="0"/>
+                <a:ea typeface="Arial" pitchFamily="34" charset="-122"/>
+                <a:cs typeface="Arial" pitchFamily="34" charset="-120"/>
               </a:rPr>
               <a:t>sha256 precompile calls with a growing payload; conflicts held near zero.</a:t>
             </a:r>
